--- a/templates/footer.pptx
+++ b/templates/footer.pptx
@@ -1,20 +1,20 @@
 
 <file path=ppt/presentation.xml><?xml version="1.0" encoding="utf-8"?>
-<p:presentation xmlns:a="http://schemas.openxmlformats.org/drawingml/2006/main" xmlns:r="http://schemas.openxmlformats.org/officeDocument/2006/relationships" xmlns:p="http://schemas.openxmlformats.org/presentationml/2006/main" saveSubsetFonts="1">
+<p:presentation xmlns:a="http://schemas.openxmlformats.org/drawingml/2006/main" xmlns:r="http://schemas.openxmlformats.org/officeDocument/2006/relationships" xmlns:p="http://schemas.openxmlformats.org/presentationml/2006/main" saveSubsetFonts="1" autoCompressPictures="0">
   <p:sldMasterIdLst>
     <p:sldMasterId id="2147483648" r:id="rId1"/>
   </p:sldMasterIdLst>
   <p:sldIdLst>
-    <p:sldId id="256" r:id="rId2"/>
+    <p:sldId id="256" r:id="rId7"/>
   </p:sldIdLst>
-  <p:sldSz cx="12192000" cy="6858000"/>
+  <p:sldSz cx="12191695" cy="6858000" type="screen4x3"/>
   <p:notesSz cx="6858000" cy="9144000"/>
   <p:defaultTextStyle>
     <a:defPPr>
-      <a:defRPr lang="ja-JP"/>
+      <a:defRPr lang="en-US"/>
     </a:defPPr>
-    <a:lvl1pPr marL="0" algn="l" defTabSz="914400" rtl="0" eaLnBrk="1" latinLnBrk="0" hangingPunct="1">
-      <a:defRPr kumimoji="1" sz="1800" kern="1200">
+    <a:lvl1pPr marL="0" algn="l" defTabSz="457200" rtl="0" eaLnBrk="1" latinLnBrk="0" hangingPunct="1">
+      <a:defRPr sz="1800" kern="1200">
         <a:solidFill>
           <a:schemeClr val="tx1"/>
         </a:solidFill>
@@ -23,8 +23,8 @@
         <a:cs typeface="+mn-cs"/>
       </a:defRPr>
     </a:lvl1pPr>
-    <a:lvl2pPr marL="457200" algn="l" defTabSz="914400" rtl="0" eaLnBrk="1" latinLnBrk="0" hangingPunct="1">
-      <a:defRPr kumimoji="1" sz="1800" kern="1200">
+    <a:lvl2pPr marL="457200" algn="l" defTabSz="457200" rtl="0" eaLnBrk="1" latinLnBrk="0" hangingPunct="1">
+      <a:defRPr sz="1800" kern="1200">
         <a:solidFill>
           <a:schemeClr val="tx1"/>
         </a:solidFill>
@@ -33,8 +33,8 @@
         <a:cs typeface="+mn-cs"/>
       </a:defRPr>
     </a:lvl2pPr>
-    <a:lvl3pPr marL="914400" algn="l" defTabSz="914400" rtl="0" eaLnBrk="1" latinLnBrk="0" hangingPunct="1">
-      <a:defRPr kumimoji="1" sz="1800" kern="1200">
+    <a:lvl3pPr marL="914400" algn="l" defTabSz="457200" rtl="0" eaLnBrk="1" latinLnBrk="0" hangingPunct="1">
+      <a:defRPr sz="1800" kern="1200">
         <a:solidFill>
           <a:schemeClr val="tx1"/>
         </a:solidFill>
@@ -43,8 +43,8 @@
         <a:cs typeface="+mn-cs"/>
       </a:defRPr>
     </a:lvl3pPr>
-    <a:lvl4pPr marL="1371600" algn="l" defTabSz="914400" rtl="0" eaLnBrk="1" latinLnBrk="0" hangingPunct="1">
-      <a:defRPr kumimoji="1" sz="1800" kern="1200">
+    <a:lvl4pPr marL="1371600" algn="l" defTabSz="457200" rtl="0" eaLnBrk="1" latinLnBrk="0" hangingPunct="1">
+      <a:defRPr sz="1800" kern="1200">
         <a:solidFill>
           <a:schemeClr val="tx1"/>
         </a:solidFill>
@@ -53,8 +53,8 @@
         <a:cs typeface="+mn-cs"/>
       </a:defRPr>
     </a:lvl4pPr>
-    <a:lvl5pPr marL="1828800" algn="l" defTabSz="914400" rtl="0" eaLnBrk="1" latinLnBrk="0" hangingPunct="1">
-      <a:defRPr kumimoji="1" sz="1800" kern="1200">
+    <a:lvl5pPr marL="1828800" algn="l" defTabSz="457200" rtl="0" eaLnBrk="1" latinLnBrk="0" hangingPunct="1">
+      <a:defRPr sz="1800" kern="1200">
         <a:solidFill>
           <a:schemeClr val="tx1"/>
         </a:solidFill>
@@ -63,8 +63,8 @@
         <a:cs typeface="+mn-cs"/>
       </a:defRPr>
     </a:lvl5pPr>
-    <a:lvl6pPr marL="2286000" algn="l" defTabSz="914400" rtl="0" eaLnBrk="1" latinLnBrk="0" hangingPunct="1">
-      <a:defRPr kumimoji="1" sz="1800" kern="1200">
+    <a:lvl6pPr marL="2286000" algn="l" defTabSz="457200" rtl="0" eaLnBrk="1" latinLnBrk="0" hangingPunct="1">
+      <a:defRPr sz="1800" kern="1200">
         <a:solidFill>
           <a:schemeClr val="tx1"/>
         </a:solidFill>
@@ -73,8 +73,8 @@
         <a:cs typeface="+mn-cs"/>
       </a:defRPr>
     </a:lvl6pPr>
-    <a:lvl7pPr marL="2743200" algn="l" defTabSz="914400" rtl="0" eaLnBrk="1" latinLnBrk="0" hangingPunct="1">
-      <a:defRPr kumimoji="1" sz="1800" kern="1200">
+    <a:lvl7pPr marL="2743200" algn="l" defTabSz="457200" rtl="0" eaLnBrk="1" latinLnBrk="0" hangingPunct="1">
+      <a:defRPr sz="1800" kern="1200">
         <a:solidFill>
           <a:schemeClr val="tx1"/>
         </a:solidFill>
@@ -83,8 +83,8 @@
         <a:cs typeface="+mn-cs"/>
       </a:defRPr>
     </a:lvl7pPr>
-    <a:lvl8pPr marL="3200400" algn="l" defTabSz="914400" rtl="0" eaLnBrk="1" latinLnBrk="0" hangingPunct="1">
-      <a:defRPr kumimoji="1" sz="1800" kern="1200">
+    <a:lvl8pPr marL="3200400" algn="l" defTabSz="457200" rtl="0" eaLnBrk="1" latinLnBrk="0" hangingPunct="1">
+      <a:defRPr sz="1800" kern="1200">
         <a:solidFill>
           <a:schemeClr val="tx1"/>
         </a:solidFill>
@@ -93,8 +93,8 @@
         <a:cs typeface="+mn-cs"/>
       </a:defRPr>
     </a:lvl8pPr>
-    <a:lvl9pPr marL="3657600" algn="l" defTabSz="914400" rtl="0" eaLnBrk="1" latinLnBrk="0" hangingPunct="1">
-      <a:defRPr kumimoji="1" sz="1800" kern="1200">
+    <a:lvl9pPr marL="3657600" algn="l" defTabSz="457200" rtl="0" eaLnBrk="1" latinLnBrk="0" hangingPunct="1">
+      <a:defRPr sz="1800" kern="1200">
         <a:solidFill>
           <a:schemeClr val="tx1"/>
         </a:solidFill>
@@ -109,7 +109,7 @@
 
 <file path=ppt/slideLayouts/slideLayout1.xml><?xml version="1.0" encoding="utf-8"?>
 <p:sldLayout xmlns:a="http://schemas.openxmlformats.org/drawingml/2006/main" xmlns:r="http://schemas.openxmlformats.org/officeDocument/2006/relationships" xmlns:p="http://schemas.openxmlformats.org/presentationml/2006/main" type="title" preserve="1">
-  <p:cSld name="タイトル スライド">
+  <p:cSld name="Title Slide">
     <p:spTree>
       <p:nvGrpSpPr>
         <p:cNvPr id="1" name=""/>
@@ -126,13 +126,7 @@
       </p:grpSpPr>
       <p:sp>
         <p:nvSpPr>
-          <p:cNvPr id="2" name="タイトル 1">
-            <a:extLst>
-              <a:ext uri="{FF2B5EF4-FFF2-40B4-BE49-F238E27FC236}">
-                <a16:creationId xmlns:a16="http://schemas.microsoft.com/office/drawing/2014/main" id="{1BD86A7A-9864-A2C9-BB91-CDB272FF58BE}"/>
-              </a:ext>
-            </a:extLst>
-          </p:cNvPr>
+          <p:cNvPr id="2" name="Title 1"/>
           <p:cNvSpPr>
             <a:spLocks noGrp="1"/>
           </p:cNvSpPr>
@@ -142,34 +136,25 @@
         </p:nvSpPr>
         <p:spPr>
           <a:xfrm>
-            <a:off x="1524000" y="1122363"/>
-            <a:ext cx="9144000" cy="2387600"/>
+            <a:off x="685800" y="2130425"/>
+            <a:ext cx="7772400" cy="1470025"/>
           </a:xfrm>
         </p:spPr>
         <p:txBody>
-          <a:bodyPr anchor="b"/>
-          <a:lstStyle>
-            <a:lvl1pPr algn="ctr">
-              <a:defRPr sz="6000"/>
-            </a:lvl1pPr>
-          </a:lstStyle>
-          <a:p>
-            <a:r>
-              <a:rPr kumimoji="1" lang="ja-JP" altLang="en-US"/>
-              <a:t>マスター タイトルの書式設定</a:t>
-            </a:r>
-          </a:p>
-        </p:txBody>
-      </p:sp>
-      <p:sp>
-        <p:nvSpPr>
-          <p:cNvPr id="3" name="字幕 2">
-            <a:extLst>
-              <a:ext uri="{FF2B5EF4-FFF2-40B4-BE49-F238E27FC236}">
-                <a16:creationId xmlns:a16="http://schemas.microsoft.com/office/drawing/2014/main" id="{0194FC2E-1A68-CF0F-F0DF-338CAE121FE4}"/>
-              </a:ext>
-            </a:extLst>
-          </p:cNvPr>
+          <a:bodyPr/>
+          <a:lstStyle/>
+          <a:p>
+            <a:r>
+              <a:rPr lang="en-US" smtClean="0"/>
+              <a:t>Click to edit Master title style</a:t>
+            </a:r>
+            <a:endParaRPr lang="en-US"/>
+          </a:p>
+        </p:txBody>
+      </p:sp>
+      <p:sp>
+        <p:nvSpPr>
+          <p:cNvPr id="3" name="Subtitle 2"/>
           <p:cNvSpPr>
             <a:spLocks noGrp="1"/>
           </p:cNvSpPr>
@@ -179,8 +164,8 @@
         </p:nvSpPr>
         <p:spPr>
           <a:xfrm>
-            <a:off x="1524000" y="3602038"/>
-            <a:ext cx="9144000" cy="1655762"/>
+            <a:off x="1371600" y="3886200"/>
+            <a:ext cx="6400800" cy="1752600"/>
           </a:xfrm>
         </p:spPr>
         <p:txBody>
@@ -188,58 +173,107 @@
           <a:lstStyle>
             <a:lvl1pPr marL="0" indent="0" algn="ctr">
               <a:buNone/>
-              <a:defRPr sz="2400"/>
+              <a:defRPr>
+                <a:solidFill>
+                  <a:schemeClr val="tx1">
+                    <a:tint val="75000"/>
+                  </a:schemeClr>
+                </a:solidFill>
+              </a:defRPr>
             </a:lvl1pPr>
             <a:lvl2pPr marL="457200" indent="0" algn="ctr">
               <a:buNone/>
-              <a:defRPr sz="2000"/>
+              <a:defRPr>
+                <a:solidFill>
+                  <a:schemeClr val="tx1">
+                    <a:tint val="75000"/>
+                  </a:schemeClr>
+                </a:solidFill>
+              </a:defRPr>
             </a:lvl2pPr>
             <a:lvl3pPr marL="914400" indent="0" algn="ctr">
               <a:buNone/>
-              <a:defRPr sz="1800"/>
+              <a:defRPr>
+                <a:solidFill>
+                  <a:schemeClr val="tx1">
+                    <a:tint val="75000"/>
+                  </a:schemeClr>
+                </a:solidFill>
+              </a:defRPr>
             </a:lvl3pPr>
             <a:lvl4pPr marL="1371600" indent="0" algn="ctr">
               <a:buNone/>
-              <a:defRPr sz="1600"/>
+              <a:defRPr>
+                <a:solidFill>
+                  <a:schemeClr val="tx1">
+                    <a:tint val="75000"/>
+                  </a:schemeClr>
+                </a:solidFill>
+              </a:defRPr>
             </a:lvl4pPr>
             <a:lvl5pPr marL="1828800" indent="0" algn="ctr">
               <a:buNone/>
-              <a:defRPr sz="1600"/>
+              <a:defRPr>
+                <a:solidFill>
+                  <a:schemeClr val="tx1">
+                    <a:tint val="75000"/>
+                  </a:schemeClr>
+                </a:solidFill>
+              </a:defRPr>
             </a:lvl5pPr>
             <a:lvl6pPr marL="2286000" indent="0" algn="ctr">
               <a:buNone/>
-              <a:defRPr sz="1600"/>
+              <a:defRPr>
+                <a:solidFill>
+                  <a:schemeClr val="tx1">
+                    <a:tint val="75000"/>
+                  </a:schemeClr>
+                </a:solidFill>
+              </a:defRPr>
             </a:lvl6pPr>
             <a:lvl7pPr marL="2743200" indent="0" algn="ctr">
               <a:buNone/>
-              <a:defRPr sz="1600"/>
+              <a:defRPr>
+                <a:solidFill>
+                  <a:schemeClr val="tx1">
+                    <a:tint val="75000"/>
+                  </a:schemeClr>
+                </a:solidFill>
+              </a:defRPr>
             </a:lvl7pPr>
             <a:lvl8pPr marL="3200400" indent="0" algn="ctr">
               <a:buNone/>
-              <a:defRPr sz="1600"/>
+              <a:defRPr>
+                <a:solidFill>
+                  <a:schemeClr val="tx1">
+                    <a:tint val="75000"/>
+                  </a:schemeClr>
+                </a:solidFill>
+              </a:defRPr>
             </a:lvl8pPr>
             <a:lvl9pPr marL="3657600" indent="0" algn="ctr">
               <a:buNone/>
-              <a:defRPr sz="1600"/>
+              <a:defRPr>
+                <a:solidFill>
+                  <a:schemeClr val="tx1">
+                    <a:tint val="75000"/>
+                  </a:schemeClr>
+                </a:solidFill>
+              </a:defRPr>
             </a:lvl9pPr>
           </a:lstStyle>
           <a:p>
             <a:r>
-              <a:rPr kumimoji="1" lang="ja-JP" altLang="en-US"/>
-              <a:t>マスター サブタイトルの書式設定</a:t>
-            </a:r>
-          </a:p>
-        </p:txBody>
-      </p:sp>
-      <p:sp>
-        <p:nvSpPr>
-          <p:cNvPr id="4" name="日付プレースホルダー 3">
-            <a:extLst>
-              <a:ext uri="{FF2B5EF4-FFF2-40B4-BE49-F238E27FC236}">
-                <a16:creationId xmlns:a16="http://schemas.microsoft.com/office/drawing/2014/main" id="{B0285EA0-9454-0B93-F32A-2F25FB77F208}"/>
-              </a:ext>
-            </a:extLst>
-          </p:cNvPr>
+              <a:rPr lang="en-US" smtClean="0"/>
+              <a:t>Click to edit Master subtitle style</a:t>
+            </a:r>
+            <a:endParaRPr lang="en-US"/>
+          </a:p>
+        </p:txBody>
+      </p:sp>
+      <p:sp>
+        <p:nvSpPr>
+          <p:cNvPr id="4" name="Date Placeholder 3"/>
           <p:cNvSpPr>
             <a:spLocks noGrp="1"/>
           </p:cNvSpPr>
@@ -252,23 +286,17 @@
           <a:bodyPr/>
           <a:lstStyle/>
           <a:p>
-            <a:fld id="{BD92BF0F-4C4E-4C20-B7A0-DBBE649AEBF0}" type="datetimeFigureOut">
-              <a:rPr kumimoji="1" lang="ja-JP" altLang="en-US" smtClean="0"/>
-              <a:t>2026/3/26</a:t>
+            <a:fld id="{5BCAD085-E8A6-8845-BD4E-CB4CCA059FC4}" type="datetimeFigureOut">
+              <a:rPr lang="en-US" smtClean="0"/>
+              <a:t>1/27/13</a:t>
             </a:fld>
-            <a:endParaRPr kumimoji="1" lang="ja-JP" altLang="en-US"/>
-          </a:p>
-        </p:txBody>
-      </p:sp>
-      <p:sp>
-        <p:nvSpPr>
-          <p:cNvPr id="5" name="フッター プレースホルダー 4">
-            <a:extLst>
-              <a:ext uri="{FF2B5EF4-FFF2-40B4-BE49-F238E27FC236}">
-                <a16:creationId xmlns:a16="http://schemas.microsoft.com/office/drawing/2014/main" id="{67C5CBB5-6567-5F50-2A16-02ED47D583E7}"/>
-              </a:ext>
-            </a:extLst>
-          </p:cNvPr>
+            <a:endParaRPr lang="en-US"/>
+          </a:p>
+        </p:txBody>
+      </p:sp>
+      <p:sp>
+        <p:nvSpPr>
+          <p:cNvPr id="5" name="Footer Placeholder 4"/>
           <p:cNvSpPr>
             <a:spLocks noGrp="1"/>
           </p:cNvSpPr>
@@ -281,19 +309,13 @@
           <a:bodyPr/>
           <a:lstStyle/>
           <a:p>
-            <a:endParaRPr kumimoji="1" lang="ja-JP" altLang="en-US"/>
-          </a:p>
-        </p:txBody>
-      </p:sp>
-      <p:sp>
-        <p:nvSpPr>
-          <p:cNvPr id="6" name="スライド番号プレースホルダー 5">
-            <a:extLst>
-              <a:ext uri="{FF2B5EF4-FFF2-40B4-BE49-F238E27FC236}">
-                <a16:creationId xmlns:a16="http://schemas.microsoft.com/office/drawing/2014/main" id="{89BD8687-E082-42D7-222C-329168CD4A14}"/>
-              </a:ext>
-            </a:extLst>
-          </p:cNvPr>
+            <a:endParaRPr lang="en-US"/>
+          </a:p>
+        </p:txBody>
+      </p:sp>
+      <p:sp>
+        <p:nvSpPr>
+          <p:cNvPr id="6" name="Slide Number Placeholder 5"/>
           <p:cNvSpPr>
             <a:spLocks noGrp="1"/>
           </p:cNvSpPr>
@@ -306,18 +328,18 @@
           <a:bodyPr/>
           <a:lstStyle/>
           <a:p>
-            <a:fld id="{261FE82B-A1D7-4DB1-A425-67003437CDD9}" type="slidenum">
-              <a:rPr kumimoji="1" lang="ja-JP" altLang="en-US" smtClean="0"/>
+            <a:fld id="{C1FF6DA9-008F-8B48-92A6-B652298478BF}" type="slidenum">
+              <a:rPr lang="en-US" smtClean="0"/>
               <a:t>‹#›</a:t>
             </a:fld>
-            <a:endParaRPr kumimoji="1" lang="ja-JP" altLang="en-US"/>
+            <a:endParaRPr lang="en-US"/>
           </a:p>
         </p:txBody>
       </p:sp>
     </p:spTree>
     <p:extLst>
       <p:ext uri="{BB962C8B-B14F-4D97-AF65-F5344CB8AC3E}">
-        <p14:creationId xmlns:p14="http://schemas.microsoft.com/office/powerpoint/2010/main" val="954617772"/>
+        <p14:creationId xmlns:p14="http://schemas.microsoft.com/office/powerpoint/2010/main" val="3168075583"/>
       </p:ext>
     </p:extLst>
   </p:cSld>
@@ -329,7 +351,7 @@
 
 <file path=ppt/slideLayouts/slideLayout10.xml><?xml version="1.0" encoding="utf-8"?>
 <p:sldLayout xmlns:a="http://schemas.openxmlformats.org/drawingml/2006/main" xmlns:r="http://schemas.openxmlformats.org/officeDocument/2006/relationships" xmlns:p="http://schemas.openxmlformats.org/presentationml/2006/main" type="vertTx" preserve="1">
-  <p:cSld name="タイトルと縦書きテキスト">
+  <p:cSld name="Title and Vertical Text">
     <p:spTree>
       <p:nvGrpSpPr>
         <p:cNvPr id="1" name=""/>
@@ -346,13 +368,7 @@
       </p:grpSpPr>
       <p:sp>
         <p:nvSpPr>
-          <p:cNvPr id="2" name="タイトル 1">
-            <a:extLst>
-              <a:ext uri="{FF2B5EF4-FFF2-40B4-BE49-F238E27FC236}">
-                <a16:creationId xmlns:a16="http://schemas.microsoft.com/office/drawing/2014/main" id="{66C64655-BCE2-12C6-5F0A-AFECA6DA5D85}"/>
-              </a:ext>
-            </a:extLst>
-          </p:cNvPr>
+          <p:cNvPr id="2" name="Title 1"/>
           <p:cNvSpPr>
             <a:spLocks noGrp="1"/>
           </p:cNvSpPr>
@@ -366,21 +382,16 @@
           <a:lstStyle/>
           <a:p>
             <a:r>
-              <a:rPr kumimoji="1" lang="ja-JP" altLang="en-US"/>
-              <a:t>マスター タイトルの書式設定</a:t>
-            </a:r>
-          </a:p>
-        </p:txBody>
-      </p:sp>
-      <p:sp>
-        <p:nvSpPr>
-          <p:cNvPr id="3" name="縦書きテキスト プレースホルダー 2">
-            <a:extLst>
-              <a:ext uri="{FF2B5EF4-FFF2-40B4-BE49-F238E27FC236}">
-                <a16:creationId xmlns:a16="http://schemas.microsoft.com/office/drawing/2014/main" id="{D20D1D92-A46C-021B-052B-592AAF84A66B}"/>
-              </a:ext>
-            </a:extLst>
-          </p:cNvPr>
+              <a:rPr lang="en-US" smtClean="0"/>
+              <a:t>Click to edit Master title style</a:t>
+            </a:r>
+            <a:endParaRPr lang="en-US"/>
+          </a:p>
+        </p:txBody>
+      </p:sp>
+      <p:sp>
+        <p:nvSpPr>
+          <p:cNvPr id="3" name="Vertical Text Placeholder 2"/>
           <p:cNvSpPr>
             <a:spLocks noGrp="1"/>
           </p:cNvSpPr>
@@ -395,81 +406,44 @@
           <a:p>
             <a:pPr lvl="0"/>
             <a:r>
-              <a:rPr kumimoji="1" lang="ja-JP" altLang="en-US"/>
-              <a:t>マスター テキストの書式設定</a:t>
+              <a:rPr lang="en-US" smtClean="0"/>
+              <a:t>Click to edit Master text styles</a:t>
             </a:r>
           </a:p>
           <a:p>
             <a:pPr lvl="1"/>
             <a:r>
-              <a:rPr kumimoji="1" lang="ja-JP" altLang="en-US"/>
-              <a:t>第 </a:t>
-            </a:r>
-            <a:r>
-              <a:rPr kumimoji="1" lang="en-US" altLang="ja-JP"/>
-              <a:t>2 </a:t>
-            </a:r>
-            <a:r>
-              <a:rPr kumimoji="1" lang="ja-JP" altLang="en-US"/>
-              <a:t>レベル</a:t>
+              <a:rPr lang="en-US" smtClean="0"/>
+              <a:t>Second level</a:t>
             </a:r>
           </a:p>
           <a:p>
             <a:pPr lvl="2"/>
             <a:r>
-              <a:rPr kumimoji="1" lang="ja-JP" altLang="en-US"/>
-              <a:t>第 </a:t>
-            </a:r>
-            <a:r>
-              <a:rPr kumimoji="1" lang="en-US" altLang="ja-JP"/>
-              <a:t>3 </a:t>
-            </a:r>
-            <a:r>
-              <a:rPr kumimoji="1" lang="ja-JP" altLang="en-US"/>
-              <a:t>レベル</a:t>
+              <a:rPr lang="en-US" smtClean="0"/>
+              <a:t>Third level</a:t>
             </a:r>
           </a:p>
           <a:p>
             <a:pPr lvl="3"/>
             <a:r>
-              <a:rPr kumimoji="1" lang="ja-JP" altLang="en-US"/>
-              <a:t>第 </a:t>
-            </a:r>
-            <a:r>
-              <a:rPr kumimoji="1" lang="en-US" altLang="ja-JP"/>
-              <a:t>4 </a:t>
-            </a:r>
-            <a:r>
-              <a:rPr kumimoji="1" lang="ja-JP" altLang="en-US"/>
-              <a:t>レベル</a:t>
+              <a:rPr lang="en-US" smtClean="0"/>
+              <a:t>Fourth level</a:t>
             </a:r>
           </a:p>
           <a:p>
             <a:pPr lvl="4"/>
             <a:r>
-              <a:rPr kumimoji="1" lang="ja-JP" altLang="en-US"/>
-              <a:t>第 </a:t>
-            </a:r>
-            <a:r>
-              <a:rPr kumimoji="1" lang="en-US" altLang="ja-JP"/>
-              <a:t>5 </a:t>
-            </a:r>
-            <a:r>
-              <a:rPr kumimoji="1" lang="ja-JP" altLang="en-US"/>
-              <a:t>レベル</a:t>
-            </a:r>
-          </a:p>
-        </p:txBody>
-      </p:sp>
-      <p:sp>
-        <p:nvSpPr>
-          <p:cNvPr id="4" name="日付プレースホルダー 3">
-            <a:extLst>
-              <a:ext uri="{FF2B5EF4-FFF2-40B4-BE49-F238E27FC236}">
-                <a16:creationId xmlns:a16="http://schemas.microsoft.com/office/drawing/2014/main" id="{AA4BB17F-99C0-941D-A4E7-7EA1E248DF09}"/>
-              </a:ext>
-            </a:extLst>
-          </p:cNvPr>
+              <a:rPr lang="en-US" smtClean="0"/>
+              <a:t>Fifth level</a:t>
+            </a:r>
+            <a:endParaRPr lang="en-US"/>
+          </a:p>
+        </p:txBody>
+      </p:sp>
+      <p:sp>
+        <p:nvSpPr>
+          <p:cNvPr id="4" name="Date Placeholder 3"/>
           <p:cNvSpPr>
             <a:spLocks noGrp="1"/>
           </p:cNvSpPr>
@@ -482,23 +456,17 @@
           <a:bodyPr/>
           <a:lstStyle/>
           <a:p>
-            <a:fld id="{BD92BF0F-4C4E-4C20-B7A0-DBBE649AEBF0}" type="datetimeFigureOut">
-              <a:rPr kumimoji="1" lang="ja-JP" altLang="en-US" smtClean="0"/>
-              <a:t>2026/3/26</a:t>
+            <a:fld id="{5BCAD085-E8A6-8845-BD4E-CB4CCA059FC4}" type="datetimeFigureOut">
+              <a:rPr lang="en-US" smtClean="0"/>
+              <a:t>1/27/13</a:t>
             </a:fld>
-            <a:endParaRPr kumimoji="1" lang="ja-JP" altLang="en-US"/>
-          </a:p>
-        </p:txBody>
-      </p:sp>
-      <p:sp>
-        <p:nvSpPr>
-          <p:cNvPr id="5" name="フッター プレースホルダー 4">
-            <a:extLst>
-              <a:ext uri="{FF2B5EF4-FFF2-40B4-BE49-F238E27FC236}">
-                <a16:creationId xmlns:a16="http://schemas.microsoft.com/office/drawing/2014/main" id="{C966FFF1-AFB4-F7DC-CE20-9EA9C38E2A0D}"/>
-              </a:ext>
-            </a:extLst>
-          </p:cNvPr>
+            <a:endParaRPr lang="en-US"/>
+          </a:p>
+        </p:txBody>
+      </p:sp>
+      <p:sp>
+        <p:nvSpPr>
+          <p:cNvPr id="5" name="Footer Placeholder 4"/>
           <p:cNvSpPr>
             <a:spLocks noGrp="1"/>
           </p:cNvSpPr>
@@ -511,19 +479,13 @@
           <a:bodyPr/>
           <a:lstStyle/>
           <a:p>
-            <a:endParaRPr kumimoji="1" lang="ja-JP" altLang="en-US"/>
-          </a:p>
-        </p:txBody>
-      </p:sp>
-      <p:sp>
-        <p:nvSpPr>
-          <p:cNvPr id="6" name="スライド番号プレースホルダー 5">
-            <a:extLst>
-              <a:ext uri="{FF2B5EF4-FFF2-40B4-BE49-F238E27FC236}">
-                <a16:creationId xmlns:a16="http://schemas.microsoft.com/office/drawing/2014/main" id="{DE55B1F3-8301-045D-D742-679FFCD48A5D}"/>
-              </a:ext>
-            </a:extLst>
-          </p:cNvPr>
+            <a:endParaRPr lang="en-US"/>
+          </a:p>
+        </p:txBody>
+      </p:sp>
+      <p:sp>
+        <p:nvSpPr>
+          <p:cNvPr id="6" name="Slide Number Placeholder 5"/>
           <p:cNvSpPr>
             <a:spLocks noGrp="1"/>
           </p:cNvSpPr>
@@ -536,18 +498,18 @@
           <a:bodyPr/>
           <a:lstStyle/>
           <a:p>
-            <a:fld id="{261FE82B-A1D7-4DB1-A425-67003437CDD9}" type="slidenum">
-              <a:rPr kumimoji="1" lang="ja-JP" altLang="en-US" smtClean="0"/>
+            <a:fld id="{C1FF6DA9-008F-8B48-92A6-B652298478BF}" type="slidenum">
+              <a:rPr lang="en-US" smtClean="0"/>
               <a:t>‹#›</a:t>
             </a:fld>
-            <a:endParaRPr kumimoji="1" lang="ja-JP" altLang="en-US"/>
+            <a:endParaRPr lang="en-US"/>
           </a:p>
         </p:txBody>
       </p:sp>
     </p:spTree>
     <p:extLst>
       <p:ext uri="{BB962C8B-B14F-4D97-AF65-F5344CB8AC3E}">
-        <p14:creationId xmlns:p14="http://schemas.microsoft.com/office/powerpoint/2010/main" val="412291323"/>
+        <p14:creationId xmlns:p14="http://schemas.microsoft.com/office/powerpoint/2010/main" val="2910927964"/>
       </p:ext>
     </p:extLst>
   </p:cSld>
@@ -559,7 +521,7 @@
 
 <file path=ppt/slideLayouts/slideLayout11.xml><?xml version="1.0" encoding="utf-8"?>
 <p:sldLayout xmlns:a="http://schemas.openxmlformats.org/drawingml/2006/main" xmlns:r="http://schemas.openxmlformats.org/officeDocument/2006/relationships" xmlns:p="http://schemas.openxmlformats.org/presentationml/2006/main" type="vertTitleAndTx" preserve="1">
-  <p:cSld name="縦書きタイトルと&#10;縦書きテキスト">
+  <p:cSld name="Vertical Title and Text">
     <p:spTree>
       <p:nvGrpSpPr>
         <p:cNvPr id="1" name=""/>
@@ -576,13 +538,7 @@
       </p:grpSpPr>
       <p:sp>
         <p:nvSpPr>
-          <p:cNvPr id="2" name="縦書きタイトル 1">
-            <a:extLst>
-              <a:ext uri="{FF2B5EF4-FFF2-40B4-BE49-F238E27FC236}">
-                <a16:creationId xmlns:a16="http://schemas.microsoft.com/office/drawing/2014/main" id="{A51C7BDF-514F-37A6-137E-82F989C4F430}"/>
-              </a:ext>
-            </a:extLst>
-          </p:cNvPr>
+          <p:cNvPr id="2" name="Vertical Title 1"/>
           <p:cNvSpPr>
             <a:spLocks noGrp="1"/>
           </p:cNvSpPr>
@@ -592,8 +548,8 @@
         </p:nvSpPr>
         <p:spPr>
           <a:xfrm>
-            <a:off x="8724900" y="365125"/>
-            <a:ext cx="2628900" cy="5811838"/>
+            <a:off x="6629400" y="274638"/>
+            <a:ext cx="2057400" cy="5851525"/>
           </a:xfrm>
         </p:spPr>
         <p:txBody>
@@ -601,21 +557,16 @@
           <a:lstStyle/>
           <a:p>
             <a:r>
-              <a:rPr kumimoji="1" lang="ja-JP" altLang="en-US"/>
-              <a:t>マスター タイトルの書式設定</a:t>
-            </a:r>
-          </a:p>
-        </p:txBody>
-      </p:sp>
-      <p:sp>
-        <p:nvSpPr>
-          <p:cNvPr id="3" name="縦書きテキスト プレースホルダー 2">
-            <a:extLst>
-              <a:ext uri="{FF2B5EF4-FFF2-40B4-BE49-F238E27FC236}">
-                <a16:creationId xmlns:a16="http://schemas.microsoft.com/office/drawing/2014/main" id="{877BFC6E-E74D-D451-DF66-294BF2CBEBFE}"/>
-              </a:ext>
-            </a:extLst>
-          </p:cNvPr>
+              <a:rPr lang="en-US" smtClean="0"/>
+              <a:t>Click to edit Master title style</a:t>
+            </a:r>
+            <a:endParaRPr lang="en-US"/>
+          </a:p>
+        </p:txBody>
+      </p:sp>
+      <p:sp>
+        <p:nvSpPr>
+          <p:cNvPr id="3" name="Vertical Text Placeholder 2"/>
           <p:cNvSpPr>
             <a:spLocks noGrp="1"/>
           </p:cNvSpPr>
@@ -625,8 +576,8 @@
         </p:nvSpPr>
         <p:spPr>
           <a:xfrm>
-            <a:off x="838200" y="365125"/>
-            <a:ext cx="7734300" cy="5811838"/>
+            <a:off x="457200" y="274638"/>
+            <a:ext cx="6019800" cy="5851525"/>
           </a:xfrm>
         </p:spPr>
         <p:txBody>
@@ -635,81 +586,44 @@
           <a:p>
             <a:pPr lvl="0"/>
             <a:r>
-              <a:rPr kumimoji="1" lang="ja-JP" altLang="en-US"/>
-              <a:t>マスター テキストの書式設定</a:t>
+              <a:rPr lang="en-US" smtClean="0"/>
+              <a:t>Click to edit Master text styles</a:t>
             </a:r>
           </a:p>
           <a:p>
             <a:pPr lvl="1"/>
             <a:r>
-              <a:rPr kumimoji="1" lang="ja-JP" altLang="en-US"/>
-              <a:t>第 </a:t>
-            </a:r>
-            <a:r>
-              <a:rPr kumimoji="1" lang="en-US" altLang="ja-JP"/>
-              <a:t>2 </a:t>
-            </a:r>
-            <a:r>
-              <a:rPr kumimoji="1" lang="ja-JP" altLang="en-US"/>
-              <a:t>レベル</a:t>
+              <a:rPr lang="en-US" smtClean="0"/>
+              <a:t>Second level</a:t>
             </a:r>
           </a:p>
           <a:p>
             <a:pPr lvl="2"/>
             <a:r>
-              <a:rPr kumimoji="1" lang="ja-JP" altLang="en-US"/>
-              <a:t>第 </a:t>
-            </a:r>
-            <a:r>
-              <a:rPr kumimoji="1" lang="en-US" altLang="ja-JP"/>
-              <a:t>3 </a:t>
-            </a:r>
-            <a:r>
-              <a:rPr kumimoji="1" lang="ja-JP" altLang="en-US"/>
-              <a:t>レベル</a:t>
+              <a:rPr lang="en-US" smtClean="0"/>
+              <a:t>Third level</a:t>
             </a:r>
           </a:p>
           <a:p>
             <a:pPr lvl="3"/>
             <a:r>
-              <a:rPr kumimoji="1" lang="ja-JP" altLang="en-US"/>
-              <a:t>第 </a:t>
-            </a:r>
-            <a:r>
-              <a:rPr kumimoji="1" lang="en-US" altLang="ja-JP"/>
-              <a:t>4 </a:t>
-            </a:r>
-            <a:r>
-              <a:rPr kumimoji="1" lang="ja-JP" altLang="en-US"/>
-              <a:t>レベル</a:t>
+              <a:rPr lang="en-US" smtClean="0"/>
+              <a:t>Fourth level</a:t>
             </a:r>
           </a:p>
           <a:p>
             <a:pPr lvl="4"/>
             <a:r>
-              <a:rPr kumimoji="1" lang="ja-JP" altLang="en-US"/>
-              <a:t>第 </a:t>
-            </a:r>
-            <a:r>
-              <a:rPr kumimoji="1" lang="en-US" altLang="ja-JP"/>
-              <a:t>5 </a:t>
-            </a:r>
-            <a:r>
-              <a:rPr kumimoji="1" lang="ja-JP" altLang="en-US"/>
-              <a:t>レベル</a:t>
-            </a:r>
-          </a:p>
-        </p:txBody>
-      </p:sp>
-      <p:sp>
-        <p:nvSpPr>
-          <p:cNvPr id="4" name="日付プレースホルダー 3">
-            <a:extLst>
-              <a:ext uri="{FF2B5EF4-FFF2-40B4-BE49-F238E27FC236}">
-                <a16:creationId xmlns:a16="http://schemas.microsoft.com/office/drawing/2014/main" id="{8DD5D36B-2EA0-7753-381A-043DA6879575}"/>
-              </a:ext>
-            </a:extLst>
-          </p:cNvPr>
+              <a:rPr lang="en-US" smtClean="0"/>
+              <a:t>Fifth level</a:t>
+            </a:r>
+            <a:endParaRPr lang="en-US"/>
+          </a:p>
+        </p:txBody>
+      </p:sp>
+      <p:sp>
+        <p:nvSpPr>
+          <p:cNvPr id="4" name="Date Placeholder 3"/>
           <p:cNvSpPr>
             <a:spLocks noGrp="1"/>
           </p:cNvSpPr>
@@ -722,23 +636,17 @@
           <a:bodyPr/>
           <a:lstStyle/>
           <a:p>
-            <a:fld id="{BD92BF0F-4C4E-4C20-B7A0-DBBE649AEBF0}" type="datetimeFigureOut">
-              <a:rPr kumimoji="1" lang="ja-JP" altLang="en-US" smtClean="0"/>
-              <a:t>2026/3/26</a:t>
+            <a:fld id="{5BCAD085-E8A6-8845-BD4E-CB4CCA059FC4}" type="datetimeFigureOut">
+              <a:rPr lang="en-US" smtClean="0"/>
+              <a:t>1/27/13</a:t>
             </a:fld>
-            <a:endParaRPr kumimoji="1" lang="ja-JP" altLang="en-US"/>
-          </a:p>
-        </p:txBody>
-      </p:sp>
-      <p:sp>
-        <p:nvSpPr>
-          <p:cNvPr id="5" name="フッター プレースホルダー 4">
-            <a:extLst>
-              <a:ext uri="{FF2B5EF4-FFF2-40B4-BE49-F238E27FC236}">
-                <a16:creationId xmlns:a16="http://schemas.microsoft.com/office/drawing/2014/main" id="{277AE700-8374-FCA9-EE94-0564CDF01AFD}"/>
-              </a:ext>
-            </a:extLst>
-          </p:cNvPr>
+            <a:endParaRPr lang="en-US"/>
+          </a:p>
+        </p:txBody>
+      </p:sp>
+      <p:sp>
+        <p:nvSpPr>
+          <p:cNvPr id="5" name="Footer Placeholder 4"/>
           <p:cNvSpPr>
             <a:spLocks noGrp="1"/>
           </p:cNvSpPr>
@@ -751,19 +659,13 @@
           <a:bodyPr/>
           <a:lstStyle/>
           <a:p>
-            <a:endParaRPr kumimoji="1" lang="ja-JP" altLang="en-US"/>
-          </a:p>
-        </p:txBody>
-      </p:sp>
-      <p:sp>
-        <p:nvSpPr>
-          <p:cNvPr id="6" name="スライド番号プレースホルダー 5">
-            <a:extLst>
-              <a:ext uri="{FF2B5EF4-FFF2-40B4-BE49-F238E27FC236}">
-                <a16:creationId xmlns:a16="http://schemas.microsoft.com/office/drawing/2014/main" id="{AE269848-6CD0-B12D-F3E3-9779A5DC6356}"/>
-              </a:ext>
-            </a:extLst>
-          </p:cNvPr>
+            <a:endParaRPr lang="en-US"/>
+          </a:p>
+        </p:txBody>
+      </p:sp>
+      <p:sp>
+        <p:nvSpPr>
+          <p:cNvPr id="6" name="Slide Number Placeholder 5"/>
           <p:cNvSpPr>
             <a:spLocks noGrp="1"/>
           </p:cNvSpPr>
@@ -776,18 +678,18 @@
           <a:bodyPr/>
           <a:lstStyle/>
           <a:p>
-            <a:fld id="{261FE82B-A1D7-4DB1-A425-67003437CDD9}" type="slidenum">
-              <a:rPr kumimoji="1" lang="ja-JP" altLang="en-US" smtClean="0"/>
+            <a:fld id="{C1FF6DA9-008F-8B48-92A6-B652298478BF}" type="slidenum">
+              <a:rPr lang="en-US" smtClean="0"/>
               <a:t>‹#›</a:t>
             </a:fld>
-            <a:endParaRPr kumimoji="1" lang="ja-JP" altLang="en-US"/>
+            <a:endParaRPr lang="en-US"/>
           </a:p>
         </p:txBody>
       </p:sp>
     </p:spTree>
     <p:extLst>
       <p:ext uri="{BB962C8B-B14F-4D97-AF65-F5344CB8AC3E}">
-        <p14:creationId xmlns:p14="http://schemas.microsoft.com/office/powerpoint/2010/main" val="1725082987"/>
+        <p14:creationId xmlns:p14="http://schemas.microsoft.com/office/powerpoint/2010/main" val="3612223792"/>
       </p:ext>
     </p:extLst>
   </p:cSld>
@@ -799,7 +701,7 @@
 
 <file path=ppt/slideLayouts/slideLayout2.xml><?xml version="1.0" encoding="utf-8"?>
 <p:sldLayout xmlns:a="http://schemas.openxmlformats.org/drawingml/2006/main" xmlns:r="http://schemas.openxmlformats.org/officeDocument/2006/relationships" xmlns:p="http://schemas.openxmlformats.org/presentationml/2006/main" type="obj" preserve="1">
-  <p:cSld name="タイトルとコンテンツ">
+  <p:cSld name="Title and Content">
     <p:spTree>
       <p:nvGrpSpPr>
         <p:cNvPr id="1" name=""/>
@@ -816,13 +718,7 @@
       </p:grpSpPr>
       <p:sp>
         <p:nvSpPr>
-          <p:cNvPr id="2" name="タイトル 1">
-            <a:extLst>
-              <a:ext uri="{FF2B5EF4-FFF2-40B4-BE49-F238E27FC236}">
-                <a16:creationId xmlns:a16="http://schemas.microsoft.com/office/drawing/2014/main" id="{37751148-113A-9699-171A-1860B262921A}"/>
-              </a:ext>
-            </a:extLst>
-          </p:cNvPr>
+          <p:cNvPr id="2" name="Title 1"/>
           <p:cNvSpPr>
             <a:spLocks noGrp="1"/>
           </p:cNvSpPr>
@@ -836,21 +732,16 @@
           <a:lstStyle/>
           <a:p>
             <a:r>
-              <a:rPr kumimoji="1" lang="ja-JP" altLang="en-US"/>
-              <a:t>マスター タイトルの書式設定</a:t>
-            </a:r>
-          </a:p>
-        </p:txBody>
-      </p:sp>
-      <p:sp>
-        <p:nvSpPr>
-          <p:cNvPr id="3" name="コンテンツ プレースホルダー 2">
-            <a:extLst>
-              <a:ext uri="{FF2B5EF4-FFF2-40B4-BE49-F238E27FC236}">
-                <a16:creationId xmlns:a16="http://schemas.microsoft.com/office/drawing/2014/main" id="{BDB956E1-02B7-4F83-C11F-17DD11647E8E}"/>
-              </a:ext>
-            </a:extLst>
-          </p:cNvPr>
+              <a:rPr lang="en-US" smtClean="0"/>
+              <a:t>Click to edit Master title style</a:t>
+            </a:r>
+            <a:endParaRPr lang="en-US"/>
+          </a:p>
+        </p:txBody>
+      </p:sp>
+      <p:sp>
+        <p:nvSpPr>
+          <p:cNvPr id="3" name="Content Placeholder 2"/>
           <p:cNvSpPr>
             <a:spLocks noGrp="1"/>
           </p:cNvSpPr>
@@ -865,81 +756,44 @@
           <a:p>
             <a:pPr lvl="0"/>
             <a:r>
-              <a:rPr kumimoji="1" lang="ja-JP" altLang="en-US"/>
-              <a:t>マスター テキストの書式設定</a:t>
+              <a:rPr lang="en-US" smtClean="0"/>
+              <a:t>Click to edit Master text styles</a:t>
             </a:r>
           </a:p>
           <a:p>
             <a:pPr lvl="1"/>
             <a:r>
-              <a:rPr kumimoji="1" lang="ja-JP" altLang="en-US"/>
-              <a:t>第 </a:t>
-            </a:r>
-            <a:r>
-              <a:rPr kumimoji="1" lang="en-US" altLang="ja-JP"/>
-              <a:t>2 </a:t>
-            </a:r>
-            <a:r>
-              <a:rPr kumimoji="1" lang="ja-JP" altLang="en-US"/>
-              <a:t>レベル</a:t>
+              <a:rPr lang="en-US" smtClean="0"/>
+              <a:t>Second level</a:t>
             </a:r>
           </a:p>
           <a:p>
             <a:pPr lvl="2"/>
             <a:r>
-              <a:rPr kumimoji="1" lang="ja-JP" altLang="en-US"/>
-              <a:t>第 </a:t>
-            </a:r>
-            <a:r>
-              <a:rPr kumimoji="1" lang="en-US" altLang="ja-JP"/>
-              <a:t>3 </a:t>
-            </a:r>
-            <a:r>
-              <a:rPr kumimoji="1" lang="ja-JP" altLang="en-US"/>
-              <a:t>レベル</a:t>
+              <a:rPr lang="en-US" smtClean="0"/>
+              <a:t>Third level</a:t>
             </a:r>
           </a:p>
           <a:p>
             <a:pPr lvl="3"/>
             <a:r>
-              <a:rPr kumimoji="1" lang="ja-JP" altLang="en-US"/>
-              <a:t>第 </a:t>
-            </a:r>
-            <a:r>
-              <a:rPr kumimoji="1" lang="en-US" altLang="ja-JP"/>
-              <a:t>4 </a:t>
-            </a:r>
-            <a:r>
-              <a:rPr kumimoji="1" lang="ja-JP" altLang="en-US"/>
-              <a:t>レベル</a:t>
+              <a:rPr lang="en-US" smtClean="0"/>
+              <a:t>Fourth level</a:t>
             </a:r>
           </a:p>
           <a:p>
             <a:pPr lvl="4"/>
             <a:r>
-              <a:rPr kumimoji="1" lang="ja-JP" altLang="en-US"/>
-              <a:t>第 </a:t>
-            </a:r>
-            <a:r>
-              <a:rPr kumimoji="1" lang="en-US" altLang="ja-JP"/>
-              <a:t>5 </a:t>
-            </a:r>
-            <a:r>
-              <a:rPr kumimoji="1" lang="ja-JP" altLang="en-US"/>
-              <a:t>レベル</a:t>
-            </a:r>
-          </a:p>
-        </p:txBody>
-      </p:sp>
-      <p:sp>
-        <p:nvSpPr>
-          <p:cNvPr id="4" name="日付プレースホルダー 3">
-            <a:extLst>
-              <a:ext uri="{FF2B5EF4-FFF2-40B4-BE49-F238E27FC236}">
-                <a16:creationId xmlns:a16="http://schemas.microsoft.com/office/drawing/2014/main" id="{82E00FF1-0301-FF3B-1713-AA5A51917A45}"/>
-              </a:ext>
-            </a:extLst>
-          </p:cNvPr>
+              <a:rPr lang="en-US" smtClean="0"/>
+              <a:t>Fifth level</a:t>
+            </a:r>
+            <a:endParaRPr lang="en-US"/>
+          </a:p>
+        </p:txBody>
+      </p:sp>
+      <p:sp>
+        <p:nvSpPr>
+          <p:cNvPr id="4" name="Date Placeholder 3"/>
           <p:cNvSpPr>
             <a:spLocks noGrp="1"/>
           </p:cNvSpPr>
@@ -952,23 +806,17 @@
           <a:bodyPr/>
           <a:lstStyle/>
           <a:p>
-            <a:fld id="{BD92BF0F-4C4E-4C20-B7A0-DBBE649AEBF0}" type="datetimeFigureOut">
-              <a:rPr kumimoji="1" lang="ja-JP" altLang="en-US" smtClean="0"/>
-              <a:t>2026/3/26</a:t>
+            <a:fld id="{5BCAD085-E8A6-8845-BD4E-CB4CCA059FC4}" type="datetimeFigureOut">
+              <a:rPr lang="en-US" smtClean="0"/>
+              <a:t>1/27/13</a:t>
             </a:fld>
-            <a:endParaRPr kumimoji="1" lang="ja-JP" altLang="en-US"/>
-          </a:p>
-        </p:txBody>
-      </p:sp>
-      <p:sp>
-        <p:nvSpPr>
-          <p:cNvPr id="5" name="フッター プレースホルダー 4">
-            <a:extLst>
-              <a:ext uri="{FF2B5EF4-FFF2-40B4-BE49-F238E27FC236}">
-                <a16:creationId xmlns:a16="http://schemas.microsoft.com/office/drawing/2014/main" id="{3AD77C81-72FA-B1BB-8CF1-F61EF2686FA5}"/>
-              </a:ext>
-            </a:extLst>
-          </p:cNvPr>
+            <a:endParaRPr lang="en-US"/>
+          </a:p>
+        </p:txBody>
+      </p:sp>
+      <p:sp>
+        <p:nvSpPr>
+          <p:cNvPr id="5" name="Footer Placeholder 4"/>
           <p:cNvSpPr>
             <a:spLocks noGrp="1"/>
           </p:cNvSpPr>
@@ -981,19 +829,13 @@
           <a:bodyPr/>
           <a:lstStyle/>
           <a:p>
-            <a:endParaRPr kumimoji="1" lang="ja-JP" altLang="en-US"/>
-          </a:p>
-        </p:txBody>
-      </p:sp>
-      <p:sp>
-        <p:nvSpPr>
-          <p:cNvPr id="6" name="スライド番号プレースホルダー 5">
-            <a:extLst>
-              <a:ext uri="{FF2B5EF4-FFF2-40B4-BE49-F238E27FC236}">
-                <a16:creationId xmlns:a16="http://schemas.microsoft.com/office/drawing/2014/main" id="{18574FF5-A3C0-C577-1DC2-299C7A6244BA}"/>
-              </a:ext>
-            </a:extLst>
-          </p:cNvPr>
+            <a:endParaRPr lang="en-US"/>
+          </a:p>
+        </p:txBody>
+      </p:sp>
+      <p:sp>
+        <p:nvSpPr>
+          <p:cNvPr id="6" name="Slide Number Placeholder 5"/>
           <p:cNvSpPr>
             <a:spLocks noGrp="1"/>
           </p:cNvSpPr>
@@ -1006,18 +848,18 @@
           <a:bodyPr/>
           <a:lstStyle/>
           <a:p>
-            <a:fld id="{261FE82B-A1D7-4DB1-A425-67003437CDD9}" type="slidenum">
-              <a:rPr kumimoji="1" lang="ja-JP" altLang="en-US" smtClean="0"/>
+            <a:fld id="{C1FF6DA9-008F-8B48-92A6-B652298478BF}" type="slidenum">
+              <a:rPr lang="en-US" smtClean="0"/>
               <a:t>‹#›</a:t>
             </a:fld>
-            <a:endParaRPr kumimoji="1" lang="ja-JP" altLang="en-US"/>
+            <a:endParaRPr lang="en-US"/>
           </a:p>
         </p:txBody>
       </p:sp>
     </p:spTree>
     <p:extLst>
       <p:ext uri="{BB962C8B-B14F-4D97-AF65-F5344CB8AC3E}">
-        <p14:creationId xmlns:p14="http://schemas.microsoft.com/office/powerpoint/2010/main" val="567805594"/>
+        <p14:creationId xmlns:p14="http://schemas.microsoft.com/office/powerpoint/2010/main" val="2614314258"/>
       </p:ext>
     </p:extLst>
   </p:cSld>
@@ -1029,7 +871,7 @@
 
 <file path=ppt/slideLayouts/slideLayout3.xml><?xml version="1.0" encoding="utf-8"?>
 <p:sldLayout xmlns:a="http://schemas.openxmlformats.org/drawingml/2006/main" xmlns:r="http://schemas.openxmlformats.org/officeDocument/2006/relationships" xmlns:p="http://schemas.openxmlformats.org/presentationml/2006/main" type="secHead" preserve="1">
-  <p:cSld name="セクション見出し">
+  <p:cSld name="Section Header">
     <p:spTree>
       <p:nvGrpSpPr>
         <p:cNvPr id="1" name=""/>
@@ -1046,13 +888,7 @@
       </p:grpSpPr>
       <p:sp>
         <p:nvSpPr>
-          <p:cNvPr id="2" name="タイトル 1">
-            <a:extLst>
-              <a:ext uri="{FF2B5EF4-FFF2-40B4-BE49-F238E27FC236}">
-                <a16:creationId xmlns:a16="http://schemas.microsoft.com/office/drawing/2014/main" id="{58423724-0819-0195-2F32-4D6128AA905D}"/>
-              </a:ext>
-            </a:extLst>
-          </p:cNvPr>
+          <p:cNvPr id="2" name="Title 1"/>
           <p:cNvSpPr>
             <a:spLocks noGrp="1"/>
           </p:cNvSpPr>
@@ -1062,136 +898,131 @@
         </p:nvSpPr>
         <p:spPr>
           <a:xfrm>
-            <a:off x="831850" y="1709738"/>
-            <a:ext cx="10515600" cy="2852737"/>
+            <a:off x="722313" y="4406900"/>
+            <a:ext cx="7772400" cy="1362075"/>
           </a:xfrm>
         </p:spPr>
         <p:txBody>
+          <a:bodyPr anchor="t"/>
+          <a:lstStyle>
+            <a:lvl1pPr algn="l">
+              <a:defRPr sz="4000" b="1" cap="all"/>
+            </a:lvl1pPr>
+          </a:lstStyle>
+          <a:p>
+            <a:r>
+              <a:rPr lang="en-US" smtClean="0"/>
+              <a:t>Click to edit Master title style</a:t>
+            </a:r>
+            <a:endParaRPr lang="en-US"/>
+          </a:p>
+        </p:txBody>
+      </p:sp>
+      <p:sp>
+        <p:nvSpPr>
+          <p:cNvPr id="3" name="Text Placeholder 2"/>
+          <p:cNvSpPr>
+            <a:spLocks noGrp="1"/>
+          </p:cNvSpPr>
+          <p:nvPr>
+            <p:ph type="body" idx="1"/>
+          </p:nvPr>
+        </p:nvSpPr>
+        <p:spPr>
+          <a:xfrm>
+            <a:off x="722313" y="2906713"/>
+            <a:ext cx="7772400" cy="1500187"/>
+          </a:xfrm>
+        </p:spPr>
+        <p:txBody>
           <a:bodyPr anchor="b"/>
           <a:lstStyle>
-            <a:lvl1pPr>
-              <a:defRPr sz="6000"/>
-            </a:lvl1pPr>
-          </a:lstStyle>
-          <a:p>
-            <a:r>
-              <a:rPr kumimoji="1" lang="ja-JP" altLang="en-US"/>
-              <a:t>マスター タイトルの書式設定</a:t>
-            </a:r>
-          </a:p>
-        </p:txBody>
-      </p:sp>
-      <p:sp>
-        <p:nvSpPr>
-          <p:cNvPr id="3" name="テキスト プレースホルダー 2">
-            <a:extLst>
-              <a:ext uri="{FF2B5EF4-FFF2-40B4-BE49-F238E27FC236}">
-                <a16:creationId xmlns:a16="http://schemas.microsoft.com/office/drawing/2014/main" id="{0FA9AC08-40AB-5AC0-819D-3F0984BBEC49}"/>
-              </a:ext>
-            </a:extLst>
-          </p:cNvPr>
-          <p:cNvSpPr>
-            <a:spLocks noGrp="1"/>
-          </p:cNvSpPr>
-          <p:nvPr>
-            <p:ph type="body" idx="1"/>
-          </p:nvPr>
-        </p:nvSpPr>
-        <p:spPr>
-          <a:xfrm>
-            <a:off x="831850" y="4589463"/>
-            <a:ext cx="10515600" cy="1500187"/>
-          </a:xfrm>
-        </p:spPr>
-        <p:txBody>
-          <a:bodyPr/>
-          <a:lstStyle>
             <a:lvl1pPr marL="0" indent="0">
               <a:buNone/>
-              <a:defRPr sz="2400">
+              <a:defRPr sz="2000">
                 <a:solidFill>
                   <a:schemeClr val="tx1">
-                    <a:tint val="82000"/>
+                    <a:tint val="75000"/>
                   </a:schemeClr>
                 </a:solidFill>
               </a:defRPr>
             </a:lvl1pPr>
             <a:lvl2pPr marL="457200" indent="0">
               <a:buNone/>
-              <a:defRPr sz="2000">
+              <a:defRPr sz="1800">
                 <a:solidFill>
                   <a:schemeClr val="tx1">
-                    <a:tint val="82000"/>
+                    <a:tint val="75000"/>
                   </a:schemeClr>
                 </a:solidFill>
               </a:defRPr>
             </a:lvl2pPr>
             <a:lvl3pPr marL="914400" indent="0">
               <a:buNone/>
-              <a:defRPr sz="1800">
+              <a:defRPr sz="1600">
                 <a:solidFill>
                   <a:schemeClr val="tx1">
-                    <a:tint val="82000"/>
+                    <a:tint val="75000"/>
                   </a:schemeClr>
                 </a:solidFill>
               </a:defRPr>
             </a:lvl3pPr>
             <a:lvl4pPr marL="1371600" indent="0">
               <a:buNone/>
-              <a:defRPr sz="1600">
+              <a:defRPr sz="1400">
                 <a:solidFill>
                   <a:schemeClr val="tx1">
-                    <a:tint val="82000"/>
+                    <a:tint val="75000"/>
                   </a:schemeClr>
                 </a:solidFill>
               </a:defRPr>
             </a:lvl4pPr>
             <a:lvl5pPr marL="1828800" indent="0">
               <a:buNone/>
-              <a:defRPr sz="1600">
+              <a:defRPr sz="1400">
                 <a:solidFill>
                   <a:schemeClr val="tx1">
-                    <a:tint val="82000"/>
+                    <a:tint val="75000"/>
                   </a:schemeClr>
                 </a:solidFill>
               </a:defRPr>
             </a:lvl5pPr>
             <a:lvl6pPr marL="2286000" indent="0">
               <a:buNone/>
-              <a:defRPr sz="1600">
+              <a:defRPr sz="1400">
                 <a:solidFill>
                   <a:schemeClr val="tx1">
-                    <a:tint val="82000"/>
+                    <a:tint val="75000"/>
                   </a:schemeClr>
                 </a:solidFill>
               </a:defRPr>
             </a:lvl6pPr>
             <a:lvl7pPr marL="2743200" indent="0">
               <a:buNone/>
-              <a:defRPr sz="1600">
+              <a:defRPr sz="1400">
                 <a:solidFill>
                   <a:schemeClr val="tx1">
-                    <a:tint val="82000"/>
+                    <a:tint val="75000"/>
                   </a:schemeClr>
                 </a:solidFill>
               </a:defRPr>
             </a:lvl7pPr>
             <a:lvl8pPr marL="3200400" indent="0">
               <a:buNone/>
-              <a:defRPr sz="1600">
+              <a:defRPr sz="1400">
                 <a:solidFill>
                   <a:schemeClr val="tx1">
-                    <a:tint val="82000"/>
+                    <a:tint val="75000"/>
                   </a:schemeClr>
                 </a:solidFill>
               </a:defRPr>
             </a:lvl8pPr>
             <a:lvl9pPr marL="3657600" indent="0">
               <a:buNone/>
-              <a:defRPr sz="1600">
+              <a:defRPr sz="1400">
                 <a:solidFill>
                   <a:schemeClr val="tx1">
-                    <a:tint val="82000"/>
+                    <a:tint val="75000"/>
                   </a:schemeClr>
                 </a:solidFill>
               </a:defRPr>
@@ -1200,21 +1031,15 @@
           <a:p>
             <a:pPr lvl="0"/>
             <a:r>
-              <a:rPr kumimoji="1" lang="ja-JP" altLang="en-US"/>
-              <a:t>マスター テキストの書式設定</a:t>
-            </a:r>
-          </a:p>
-        </p:txBody>
-      </p:sp>
-      <p:sp>
-        <p:nvSpPr>
-          <p:cNvPr id="4" name="日付プレースホルダー 3">
-            <a:extLst>
-              <a:ext uri="{FF2B5EF4-FFF2-40B4-BE49-F238E27FC236}">
-                <a16:creationId xmlns:a16="http://schemas.microsoft.com/office/drawing/2014/main" id="{27E45FF1-B253-B6E7-87C5-0F5223F38F51}"/>
-              </a:ext>
-            </a:extLst>
-          </p:cNvPr>
+              <a:rPr lang="en-US" smtClean="0"/>
+              <a:t>Click to edit Master text styles</a:t>
+            </a:r>
+          </a:p>
+        </p:txBody>
+      </p:sp>
+      <p:sp>
+        <p:nvSpPr>
+          <p:cNvPr id="4" name="Date Placeholder 3"/>
           <p:cNvSpPr>
             <a:spLocks noGrp="1"/>
           </p:cNvSpPr>
@@ -1227,23 +1052,17 @@
           <a:bodyPr/>
           <a:lstStyle/>
           <a:p>
-            <a:fld id="{BD92BF0F-4C4E-4C20-B7A0-DBBE649AEBF0}" type="datetimeFigureOut">
-              <a:rPr kumimoji="1" lang="ja-JP" altLang="en-US" smtClean="0"/>
-              <a:t>2026/3/26</a:t>
+            <a:fld id="{5BCAD085-E8A6-8845-BD4E-CB4CCA059FC4}" type="datetimeFigureOut">
+              <a:rPr lang="en-US" smtClean="0"/>
+              <a:t>1/27/13</a:t>
             </a:fld>
-            <a:endParaRPr kumimoji="1" lang="ja-JP" altLang="en-US"/>
-          </a:p>
-        </p:txBody>
-      </p:sp>
-      <p:sp>
-        <p:nvSpPr>
-          <p:cNvPr id="5" name="フッター プレースホルダー 4">
-            <a:extLst>
-              <a:ext uri="{FF2B5EF4-FFF2-40B4-BE49-F238E27FC236}">
-                <a16:creationId xmlns:a16="http://schemas.microsoft.com/office/drawing/2014/main" id="{8E65E4A9-9A66-C339-5EBD-FA254B38E08A}"/>
-              </a:ext>
-            </a:extLst>
-          </p:cNvPr>
+            <a:endParaRPr lang="en-US"/>
+          </a:p>
+        </p:txBody>
+      </p:sp>
+      <p:sp>
+        <p:nvSpPr>
+          <p:cNvPr id="5" name="Footer Placeholder 4"/>
           <p:cNvSpPr>
             <a:spLocks noGrp="1"/>
           </p:cNvSpPr>
@@ -1256,19 +1075,13 @@
           <a:bodyPr/>
           <a:lstStyle/>
           <a:p>
-            <a:endParaRPr kumimoji="1" lang="ja-JP" altLang="en-US"/>
-          </a:p>
-        </p:txBody>
-      </p:sp>
-      <p:sp>
-        <p:nvSpPr>
-          <p:cNvPr id="6" name="スライド番号プレースホルダー 5">
-            <a:extLst>
-              <a:ext uri="{FF2B5EF4-FFF2-40B4-BE49-F238E27FC236}">
-                <a16:creationId xmlns:a16="http://schemas.microsoft.com/office/drawing/2014/main" id="{945D7A7A-277A-4BD1-846A-A499A0031ED4}"/>
-              </a:ext>
-            </a:extLst>
-          </p:cNvPr>
+            <a:endParaRPr lang="en-US"/>
+          </a:p>
+        </p:txBody>
+      </p:sp>
+      <p:sp>
+        <p:nvSpPr>
+          <p:cNvPr id="6" name="Slide Number Placeholder 5"/>
           <p:cNvSpPr>
             <a:spLocks noGrp="1"/>
           </p:cNvSpPr>
@@ -1281,18 +1094,18 @@
           <a:bodyPr/>
           <a:lstStyle/>
           <a:p>
-            <a:fld id="{261FE82B-A1D7-4DB1-A425-67003437CDD9}" type="slidenum">
-              <a:rPr kumimoji="1" lang="ja-JP" altLang="en-US" smtClean="0"/>
+            <a:fld id="{C1FF6DA9-008F-8B48-92A6-B652298478BF}" type="slidenum">
+              <a:rPr lang="en-US" smtClean="0"/>
               <a:t>‹#›</a:t>
             </a:fld>
-            <a:endParaRPr kumimoji="1" lang="ja-JP" altLang="en-US"/>
+            <a:endParaRPr lang="en-US"/>
           </a:p>
         </p:txBody>
       </p:sp>
     </p:spTree>
     <p:extLst>
       <p:ext uri="{BB962C8B-B14F-4D97-AF65-F5344CB8AC3E}">
-        <p14:creationId xmlns:p14="http://schemas.microsoft.com/office/powerpoint/2010/main" val="2485627697"/>
+        <p14:creationId xmlns:p14="http://schemas.microsoft.com/office/powerpoint/2010/main" val="960648375"/>
       </p:ext>
     </p:extLst>
   </p:cSld>
@@ -1304,7 +1117,7 @@
 
 <file path=ppt/slideLayouts/slideLayout4.xml><?xml version="1.0" encoding="utf-8"?>
 <p:sldLayout xmlns:a="http://schemas.openxmlformats.org/drawingml/2006/main" xmlns:r="http://schemas.openxmlformats.org/officeDocument/2006/relationships" xmlns:p="http://schemas.openxmlformats.org/presentationml/2006/main" type="twoObj" preserve="1">
-  <p:cSld name="2 つのコンテンツ">
+  <p:cSld name="Two Content">
     <p:spTree>
       <p:nvGrpSpPr>
         <p:cNvPr id="1" name=""/>
@@ -1321,13 +1134,7 @@
       </p:grpSpPr>
       <p:sp>
         <p:nvSpPr>
-          <p:cNvPr id="2" name="タイトル 1">
-            <a:extLst>
-              <a:ext uri="{FF2B5EF4-FFF2-40B4-BE49-F238E27FC236}">
-                <a16:creationId xmlns:a16="http://schemas.microsoft.com/office/drawing/2014/main" id="{CBCE5D74-62E4-B23E-2EE8-CDE1CDF31001}"/>
-              </a:ext>
-            </a:extLst>
-          </p:cNvPr>
+          <p:cNvPr id="2" name="Title 1"/>
           <p:cNvSpPr>
             <a:spLocks noGrp="1"/>
           </p:cNvSpPr>
@@ -1341,21 +1148,16 @@
           <a:lstStyle/>
           <a:p>
             <a:r>
-              <a:rPr kumimoji="1" lang="ja-JP" altLang="en-US"/>
-              <a:t>マスター タイトルの書式設定</a:t>
-            </a:r>
-          </a:p>
-        </p:txBody>
-      </p:sp>
-      <p:sp>
-        <p:nvSpPr>
-          <p:cNvPr id="3" name="コンテンツ プレースホルダー 2">
-            <a:extLst>
-              <a:ext uri="{FF2B5EF4-FFF2-40B4-BE49-F238E27FC236}">
-                <a16:creationId xmlns:a16="http://schemas.microsoft.com/office/drawing/2014/main" id="{CA577BF7-C7FE-45BA-A705-3FD82B441147}"/>
-              </a:ext>
-            </a:extLst>
-          </p:cNvPr>
+              <a:rPr lang="en-US" smtClean="0"/>
+              <a:t>Click to edit Master title style</a:t>
+            </a:r>
+            <a:endParaRPr lang="en-US"/>
+          </a:p>
+        </p:txBody>
+      </p:sp>
+      <p:sp>
+        <p:nvSpPr>
+          <p:cNvPr id="3" name="Content Placeholder 2"/>
           <p:cNvSpPr>
             <a:spLocks noGrp="1"/>
           </p:cNvSpPr>
@@ -1365,91 +1167,82 @@
         </p:nvSpPr>
         <p:spPr>
           <a:xfrm>
-            <a:off x="838200" y="1825625"/>
-            <a:ext cx="5181600" cy="4351338"/>
+            <a:off x="457200" y="1600200"/>
+            <a:ext cx="4038600" cy="4525963"/>
           </a:xfrm>
         </p:spPr>
         <p:txBody>
           <a:bodyPr/>
-          <a:lstStyle/>
+          <a:lstStyle>
+            <a:lvl1pPr>
+              <a:defRPr sz="2800"/>
+            </a:lvl1pPr>
+            <a:lvl2pPr>
+              <a:defRPr sz="2400"/>
+            </a:lvl2pPr>
+            <a:lvl3pPr>
+              <a:defRPr sz="2000"/>
+            </a:lvl3pPr>
+            <a:lvl4pPr>
+              <a:defRPr sz="1800"/>
+            </a:lvl4pPr>
+            <a:lvl5pPr>
+              <a:defRPr sz="1800"/>
+            </a:lvl5pPr>
+            <a:lvl6pPr>
+              <a:defRPr sz="1800"/>
+            </a:lvl6pPr>
+            <a:lvl7pPr>
+              <a:defRPr sz="1800"/>
+            </a:lvl7pPr>
+            <a:lvl8pPr>
+              <a:defRPr sz="1800"/>
+            </a:lvl8pPr>
+            <a:lvl9pPr>
+              <a:defRPr sz="1800"/>
+            </a:lvl9pPr>
+          </a:lstStyle>
           <a:p>
             <a:pPr lvl="0"/>
             <a:r>
-              <a:rPr kumimoji="1" lang="ja-JP" altLang="en-US"/>
-              <a:t>マスター テキストの書式設定</a:t>
+              <a:rPr lang="en-US" smtClean="0"/>
+              <a:t>Click to edit Master text styles</a:t>
             </a:r>
           </a:p>
           <a:p>
             <a:pPr lvl="1"/>
             <a:r>
-              <a:rPr kumimoji="1" lang="ja-JP" altLang="en-US"/>
-              <a:t>第 </a:t>
-            </a:r>
-            <a:r>
-              <a:rPr kumimoji="1" lang="en-US" altLang="ja-JP"/>
-              <a:t>2 </a:t>
-            </a:r>
-            <a:r>
-              <a:rPr kumimoji="1" lang="ja-JP" altLang="en-US"/>
-              <a:t>レベル</a:t>
+              <a:rPr lang="en-US" smtClean="0"/>
+              <a:t>Second level</a:t>
             </a:r>
           </a:p>
           <a:p>
             <a:pPr lvl="2"/>
             <a:r>
-              <a:rPr kumimoji="1" lang="ja-JP" altLang="en-US"/>
-              <a:t>第 </a:t>
-            </a:r>
-            <a:r>
-              <a:rPr kumimoji="1" lang="en-US" altLang="ja-JP"/>
-              <a:t>3 </a:t>
-            </a:r>
-            <a:r>
-              <a:rPr kumimoji="1" lang="ja-JP" altLang="en-US"/>
-              <a:t>レベル</a:t>
+              <a:rPr lang="en-US" smtClean="0"/>
+              <a:t>Third level</a:t>
             </a:r>
           </a:p>
           <a:p>
             <a:pPr lvl="3"/>
             <a:r>
-              <a:rPr kumimoji="1" lang="ja-JP" altLang="en-US"/>
-              <a:t>第 </a:t>
-            </a:r>
-            <a:r>
-              <a:rPr kumimoji="1" lang="en-US" altLang="ja-JP"/>
-              <a:t>4 </a:t>
-            </a:r>
-            <a:r>
-              <a:rPr kumimoji="1" lang="ja-JP" altLang="en-US"/>
-              <a:t>レベル</a:t>
+              <a:rPr lang="en-US" smtClean="0"/>
+              <a:t>Fourth level</a:t>
             </a:r>
           </a:p>
           <a:p>
             <a:pPr lvl="4"/>
             <a:r>
-              <a:rPr kumimoji="1" lang="ja-JP" altLang="en-US"/>
-              <a:t>第 </a:t>
-            </a:r>
-            <a:r>
-              <a:rPr kumimoji="1" lang="en-US" altLang="ja-JP"/>
-              <a:t>5 </a:t>
-            </a:r>
-            <a:r>
-              <a:rPr kumimoji="1" lang="ja-JP" altLang="en-US"/>
-              <a:t>レベル</a:t>
-            </a:r>
-          </a:p>
-        </p:txBody>
-      </p:sp>
-      <p:sp>
-        <p:nvSpPr>
-          <p:cNvPr id="4" name="コンテンツ プレースホルダー 3">
-            <a:extLst>
-              <a:ext uri="{FF2B5EF4-FFF2-40B4-BE49-F238E27FC236}">
-                <a16:creationId xmlns:a16="http://schemas.microsoft.com/office/drawing/2014/main" id="{8F1BFF64-79C9-31D5-2355-69A9068F9CF5}"/>
-              </a:ext>
-            </a:extLst>
-          </p:cNvPr>
+              <a:rPr lang="en-US" smtClean="0"/>
+              <a:t>Fifth level</a:t>
+            </a:r>
+            <a:endParaRPr lang="en-US"/>
+          </a:p>
+        </p:txBody>
+      </p:sp>
+      <p:sp>
+        <p:nvSpPr>
+          <p:cNvPr id="4" name="Content Placeholder 3"/>
           <p:cNvSpPr>
             <a:spLocks noGrp="1"/>
           </p:cNvSpPr>
@@ -1459,91 +1252,82 @@
         </p:nvSpPr>
         <p:spPr>
           <a:xfrm>
-            <a:off x="6172200" y="1825625"/>
-            <a:ext cx="5181600" cy="4351338"/>
+            <a:off x="4648200" y="1600200"/>
+            <a:ext cx="4038600" cy="4525963"/>
           </a:xfrm>
         </p:spPr>
         <p:txBody>
           <a:bodyPr/>
-          <a:lstStyle/>
+          <a:lstStyle>
+            <a:lvl1pPr>
+              <a:defRPr sz="2800"/>
+            </a:lvl1pPr>
+            <a:lvl2pPr>
+              <a:defRPr sz="2400"/>
+            </a:lvl2pPr>
+            <a:lvl3pPr>
+              <a:defRPr sz="2000"/>
+            </a:lvl3pPr>
+            <a:lvl4pPr>
+              <a:defRPr sz="1800"/>
+            </a:lvl4pPr>
+            <a:lvl5pPr>
+              <a:defRPr sz="1800"/>
+            </a:lvl5pPr>
+            <a:lvl6pPr>
+              <a:defRPr sz="1800"/>
+            </a:lvl6pPr>
+            <a:lvl7pPr>
+              <a:defRPr sz="1800"/>
+            </a:lvl7pPr>
+            <a:lvl8pPr>
+              <a:defRPr sz="1800"/>
+            </a:lvl8pPr>
+            <a:lvl9pPr>
+              <a:defRPr sz="1800"/>
+            </a:lvl9pPr>
+          </a:lstStyle>
           <a:p>
             <a:pPr lvl="0"/>
             <a:r>
-              <a:rPr kumimoji="1" lang="ja-JP" altLang="en-US"/>
-              <a:t>マスター テキストの書式設定</a:t>
+              <a:rPr lang="en-US" smtClean="0"/>
+              <a:t>Click to edit Master text styles</a:t>
             </a:r>
           </a:p>
           <a:p>
             <a:pPr lvl="1"/>
             <a:r>
-              <a:rPr kumimoji="1" lang="ja-JP" altLang="en-US"/>
-              <a:t>第 </a:t>
-            </a:r>
-            <a:r>
-              <a:rPr kumimoji="1" lang="en-US" altLang="ja-JP"/>
-              <a:t>2 </a:t>
-            </a:r>
-            <a:r>
-              <a:rPr kumimoji="1" lang="ja-JP" altLang="en-US"/>
-              <a:t>レベル</a:t>
+              <a:rPr lang="en-US" smtClean="0"/>
+              <a:t>Second level</a:t>
             </a:r>
           </a:p>
           <a:p>
             <a:pPr lvl="2"/>
             <a:r>
-              <a:rPr kumimoji="1" lang="ja-JP" altLang="en-US"/>
-              <a:t>第 </a:t>
-            </a:r>
-            <a:r>
-              <a:rPr kumimoji="1" lang="en-US" altLang="ja-JP"/>
-              <a:t>3 </a:t>
-            </a:r>
-            <a:r>
-              <a:rPr kumimoji="1" lang="ja-JP" altLang="en-US"/>
-              <a:t>レベル</a:t>
+              <a:rPr lang="en-US" smtClean="0"/>
+              <a:t>Third level</a:t>
             </a:r>
           </a:p>
           <a:p>
             <a:pPr lvl="3"/>
             <a:r>
-              <a:rPr kumimoji="1" lang="ja-JP" altLang="en-US"/>
-              <a:t>第 </a:t>
-            </a:r>
-            <a:r>
-              <a:rPr kumimoji="1" lang="en-US" altLang="ja-JP"/>
-              <a:t>4 </a:t>
-            </a:r>
-            <a:r>
-              <a:rPr kumimoji="1" lang="ja-JP" altLang="en-US"/>
-              <a:t>レベル</a:t>
+              <a:rPr lang="en-US" smtClean="0"/>
+              <a:t>Fourth level</a:t>
             </a:r>
           </a:p>
           <a:p>
             <a:pPr lvl="4"/>
             <a:r>
-              <a:rPr kumimoji="1" lang="ja-JP" altLang="en-US"/>
-              <a:t>第 </a:t>
-            </a:r>
-            <a:r>
-              <a:rPr kumimoji="1" lang="en-US" altLang="ja-JP"/>
-              <a:t>5 </a:t>
-            </a:r>
-            <a:r>
-              <a:rPr kumimoji="1" lang="ja-JP" altLang="en-US"/>
-              <a:t>レベル</a:t>
-            </a:r>
-          </a:p>
-        </p:txBody>
-      </p:sp>
-      <p:sp>
-        <p:nvSpPr>
-          <p:cNvPr id="5" name="日付プレースホルダー 4">
-            <a:extLst>
-              <a:ext uri="{FF2B5EF4-FFF2-40B4-BE49-F238E27FC236}">
-                <a16:creationId xmlns:a16="http://schemas.microsoft.com/office/drawing/2014/main" id="{A4A87A3E-4A6D-0E02-680A-EE40DAA42EFA}"/>
-              </a:ext>
-            </a:extLst>
-          </p:cNvPr>
+              <a:rPr lang="en-US" smtClean="0"/>
+              <a:t>Fifth level</a:t>
+            </a:r>
+            <a:endParaRPr lang="en-US"/>
+          </a:p>
+        </p:txBody>
+      </p:sp>
+      <p:sp>
+        <p:nvSpPr>
+          <p:cNvPr id="5" name="Date Placeholder 4"/>
           <p:cNvSpPr>
             <a:spLocks noGrp="1"/>
           </p:cNvSpPr>
@@ -1556,23 +1340,17 @@
           <a:bodyPr/>
           <a:lstStyle/>
           <a:p>
-            <a:fld id="{BD92BF0F-4C4E-4C20-B7A0-DBBE649AEBF0}" type="datetimeFigureOut">
-              <a:rPr kumimoji="1" lang="ja-JP" altLang="en-US" smtClean="0"/>
-              <a:t>2026/3/26</a:t>
+            <a:fld id="{5BCAD085-E8A6-8845-BD4E-CB4CCA059FC4}" type="datetimeFigureOut">
+              <a:rPr lang="en-US" smtClean="0"/>
+              <a:t>1/27/13</a:t>
             </a:fld>
-            <a:endParaRPr kumimoji="1" lang="ja-JP" altLang="en-US"/>
-          </a:p>
-        </p:txBody>
-      </p:sp>
-      <p:sp>
-        <p:nvSpPr>
-          <p:cNvPr id="6" name="フッター プレースホルダー 5">
-            <a:extLst>
-              <a:ext uri="{FF2B5EF4-FFF2-40B4-BE49-F238E27FC236}">
-                <a16:creationId xmlns:a16="http://schemas.microsoft.com/office/drawing/2014/main" id="{FFC62478-2A7C-3578-7477-B69D897C526E}"/>
-              </a:ext>
-            </a:extLst>
-          </p:cNvPr>
+            <a:endParaRPr lang="en-US"/>
+          </a:p>
+        </p:txBody>
+      </p:sp>
+      <p:sp>
+        <p:nvSpPr>
+          <p:cNvPr id="6" name="Footer Placeholder 5"/>
           <p:cNvSpPr>
             <a:spLocks noGrp="1"/>
           </p:cNvSpPr>
@@ -1585,19 +1363,13 @@
           <a:bodyPr/>
           <a:lstStyle/>
           <a:p>
-            <a:endParaRPr kumimoji="1" lang="ja-JP" altLang="en-US"/>
-          </a:p>
-        </p:txBody>
-      </p:sp>
-      <p:sp>
-        <p:nvSpPr>
-          <p:cNvPr id="7" name="スライド番号プレースホルダー 6">
-            <a:extLst>
-              <a:ext uri="{FF2B5EF4-FFF2-40B4-BE49-F238E27FC236}">
-                <a16:creationId xmlns:a16="http://schemas.microsoft.com/office/drawing/2014/main" id="{BC40B1C4-C095-E474-0940-9127779E8815}"/>
-              </a:ext>
-            </a:extLst>
-          </p:cNvPr>
+            <a:endParaRPr lang="en-US"/>
+          </a:p>
+        </p:txBody>
+      </p:sp>
+      <p:sp>
+        <p:nvSpPr>
+          <p:cNvPr id="7" name="Slide Number Placeholder 6"/>
           <p:cNvSpPr>
             <a:spLocks noGrp="1"/>
           </p:cNvSpPr>
@@ -1610,18 +1382,18 @@
           <a:bodyPr/>
           <a:lstStyle/>
           <a:p>
-            <a:fld id="{261FE82B-A1D7-4DB1-A425-67003437CDD9}" type="slidenum">
-              <a:rPr kumimoji="1" lang="ja-JP" altLang="en-US" smtClean="0"/>
+            <a:fld id="{C1FF6DA9-008F-8B48-92A6-B652298478BF}" type="slidenum">
+              <a:rPr lang="en-US" smtClean="0"/>
               <a:t>‹#›</a:t>
             </a:fld>
-            <a:endParaRPr kumimoji="1" lang="ja-JP" altLang="en-US"/>
+            <a:endParaRPr lang="en-US"/>
           </a:p>
         </p:txBody>
       </p:sp>
     </p:spTree>
     <p:extLst>
       <p:ext uri="{BB962C8B-B14F-4D97-AF65-F5344CB8AC3E}">
-        <p14:creationId xmlns:p14="http://schemas.microsoft.com/office/powerpoint/2010/main" val="2136534696"/>
+        <p14:creationId xmlns:p14="http://schemas.microsoft.com/office/powerpoint/2010/main" val="2782244947"/>
       </p:ext>
     </p:extLst>
   </p:cSld>
@@ -1633,7 +1405,7 @@
 
 <file path=ppt/slideLayouts/slideLayout5.xml><?xml version="1.0" encoding="utf-8"?>
 <p:sldLayout xmlns:a="http://schemas.openxmlformats.org/drawingml/2006/main" xmlns:r="http://schemas.openxmlformats.org/officeDocument/2006/relationships" xmlns:p="http://schemas.openxmlformats.org/presentationml/2006/main" type="twoTxTwoObj" preserve="1">
-  <p:cSld name="比較">
+  <p:cSld name="Comparison">
     <p:spTree>
       <p:nvGrpSpPr>
         <p:cNvPr id="1" name=""/>
@@ -1650,57 +1422,45 @@
       </p:grpSpPr>
       <p:sp>
         <p:nvSpPr>
-          <p:cNvPr id="2" name="タイトル 1">
-            <a:extLst>
-              <a:ext uri="{FF2B5EF4-FFF2-40B4-BE49-F238E27FC236}">
-                <a16:creationId xmlns:a16="http://schemas.microsoft.com/office/drawing/2014/main" id="{557B5F74-EEBA-59D2-5AEF-76C7C181C2BB}"/>
-              </a:ext>
-            </a:extLst>
-          </p:cNvPr>
+          <p:cNvPr id="2" name="Title 1"/>
           <p:cNvSpPr>
             <a:spLocks noGrp="1"/>
           </p:cNvSpPr>
           <p:nvPr>
             <p:ph type="title"/>
+          </p:nvPr>
+        </p:nvSpPr>
+        <p:spPr/>
+        <p:txBody>
+          <a:bodyPr/>
+          <a:lstStyle>
+            <a:lvl1pPr>
+              <a:defRPr/>
+            </a:lvl1pPr>
+          </a:lstStyle>
+          <a:p>
+            <a:r>
+              <a:rPr lang="en-US" smtClean="0"/>
+              <a:t>Click to edit Master title style</a:t>
+            </a:r>
+            <a:endParaRPr lang="en-US"/>
+          </a:p>
+        </p:txBody>
+      </p:sp>
+      <p:sp>
+        <p:nvSpPr>
+          <p:cNvPr id="3" name="Text Placeholder 2"/>
+          <p:cNvSpPr>
+            <a:spLocks noGrp="1"/>
+          </p:cNvSpPr>
+          <p:nvPr>
+            <p:ph type="body" idx="1"/>
           </p:nvPr>
         </p:nvSpPr>
         <p:spPr>
           <a:xfrm>
-            <a:off x="839788" y="365125"/>
-            <a:ext cx="10515600" cy="1325563"/>
-          </a:xfrm>
-        </p:spPr>
-        <p:txBody>
-          <a:bodyPr/>
-          <a:lstStyle/>
-          <a:p>
-            <a:r>
-              <a:rPr kumimoji="1" lang="ja-JP" altLang="en-US"/>
-              <a:t>マスター タイトルの書式設定</a:t>
-            </a:r>
-          </a:p>
-        </p:txBody>
-      </p:sp>
-      <p:sp>
-        <p:nvSpPr>
-          <p:cNvPr id="3" name="テキスト プレースホルダー 2">
-            <a:extLst>
-              <a:ext uri="{FF2B5EF4-FFF2-40B4-BE49-F238E27FC236}">
-                <a16:creationId xmlns:a16="http://schemas.microsoft.com/office/drawing/2014/main" id="{81410586-7DD6-A757-F280-B2186819F536}"/>
-              </a:ext>
-            </a:extLst>
-          </p:cNvPr>
-          <p:cNvSpPr>
-            <a:spLocks noGrp="1"/>
-          </p:cNvSpPr>
-          <p:nvPr>
-            <p:ph type="body" idx="1"/>
-          </p:nvPr>
-        </p:nvSpPr>
-        <p:spPr>
-          <a:xfrm>
-            <a:off x="839788" y="1681163"/>
-            <a:ext cx="5157787" cy="823912"/>
+            <a:off x="457200" y="1535113"/>
+            <a:ext cx="4040188" cy="639762"/>
           </a:xfrm>
         </p:spPr>
         <p:txBody>
@@ -1746,21 +1506,15 @@
           <a:p>
             <a:pPr lvl="0"/>
             <a:r>
-              <a:rPr kumimoji="1" lang="ja-JP" altLang="en-US"/>
-              <a:t>マスター テキストの書式設定</a:t>
-            </a:r>
-          </a:p>
-        </p:txBody>
-      </p:sp>
-      <p:sp>
-        <p:nvSpPr>
-          <p:cNvPr id="4" name="コンテンツ プレースホルダー 3">
-            <a:extLst>
-              <a:ext uri="{FF2B5EF4-FFF2-40B4-BE49-F238E27FC236}">
-                <a16:creationId xmlns:a16="http://schemas.microsoft.com/office/drawing/2014/main" id="{84118E91-6A28-4ADA-5750-9FA2DDAC5299}"/>
-              </a:ext>
-            </a:extLst>
-          </p:cNvPr>
+              <a:rPr lang="en-US" smtClean="0"/>
+              <a:t>Click to edit Master text styles</a:t>
+            </a:r>
+          </a:p>
+        </p:txBody>
+      </p:sp>
+      <p:sp>
+        <p:nvSpPr>
+          <p:cNvPr id="4" name="Content Placeholder 3"/>
           <p:cNvSpPr>
             <a:spLocks noGrp="1"/>
           </p:cNvSpPr>
@@ -1770,91 +1524,82 @@
         </p:nvSpPr>
         <p:spPr>
           <a:xfrm>
-            <a:off x="839788" y="2505075"/>
-            <a:ext cx="5157787" cy="3684588"/>
+            <a:off x="457200" y="2174875"/>
+            <a:ext cx="4040188" cy="3951288"/>
           </a:xfrm>
         </p:spPr>
         <p:txBody>
           <a:bodyPr/>
-          <a:lstStyle/>
+          <a:lstStyle>
+            <a:lvl1pPr>
+              <a:defRPr sz="2400"/>
+            </a:lvl1pPr>
+            <a:lvl2pPr>
+              <a:defRPr sz="2000"/>
+            </a:lvl2pPr>
+            <a:lvl3pPr>
+              <a:defRPr sz="1800"/>
+            </a:lvl3pPr>
+            <a:lvl4pPr>
+              <a:defRPr sz="1600"/>
+            </a:lvl4pPr>
+            <a:lvl5pPr>
+              <a:defRPr sz="1600"/>
+            </a:lvl5pPr>
+            <a:lvl6pPr>
+              <a:defRPr sz="1600"/>
+            </a:lvl6pPr>
+            <a:lvl7pPr>
+              <a:defRPr sz="1600"/>
+            </a:lvl7pPr>
+            <a:lvl8pPr>
+              <a:defRPr sz="1600"/>
+            </a:lvl8pPr>
+            <a:lvl9pPr>
+              <a:defRPr sz="1600"/>
+            </a:lvl9pPr>
+          </a:lstStyle>
           <a:p>
             <a:pPr lvl="0"/>
             <a:r>
-              <a:rPr kumimoji="1" lang="ja-JP" altLang="en-US"/>
-              <a:t>マスター テキストの書式設定</a:t>
+              <a:rPr lang="en-US" smtClean="0"/>
+              <a:t>Click to edit Master text styles</a:t>
             </a:r>
           </a:p>
           <a:p>
             <a:pPr lvl="1"/>
             <a:r>
-              <a:rPr kumimoji="1" lang="ja-JP" altLang="en-US"/>
-              <a:t>第 </a:t>
-            </a:r>
-            <a:r>
-              <a:rPr kumimoji="1" lang="en-US" altLang="ja-JP"/>
-              <a:t>2 </a:t>
-            </a:r>
-            <a:r>
-              <a:rPr kumimoji="1" lang="ja-JP" altLang="en-US"/>
-              <a:t>レベル</a:t>
+              <a:rPr lang="en-US" smtClean="0"/>
+              <a:t>Second level</a:t>
             </a:r>
           </a:p>
           <a:p>
             <a:pPr lvl="2"/>
             <a:r>
-              <a:rPr kumimoji="1" lang="ja-JP" altLang="en-US"/>
-              <a:t>第 </a:t>
-            </a:r>
-            <a:r>
-              <a:rPr kumimoji="1" lang="en-US" altLang="ja-JP"/>
-              <a:t>3 </a:t>
-            </a:r>
-            <a:r>
-              <a:rPr kumimoji="1" lang="ja-JP" altLang="en-US"/>
-              <a:t>レベル</a:t>
+              <a:rPr lang="en-US" smtClean="0"/>
+              <a:t>Third level</a:t>
             </a:r>
           </a:p>
           <a:p>
             <a:pPr lvl="3"/>
             <a:r>
-              <a:rPr kumimoji="1" lang="ja-JP" altLang="en-US"/>
-              <a:t>第 </a:t>
-            </a:r>
-            <a:r>
-              <a:rPr kumimoji="1" lang="en-US" altLang="ja-JP"/>
-              <a:t>4 </a:t>
-            </a:r>
-            <a:r>
-              <a:rPr kumimoji="1" lang="ja-JP" altLang="en-US"/>
-              <a:t>レベル</a:t>
+              <a:rPr lang="en-US" smtClean="0"/>
+              <a:t>Fourth level</a:t>
             </a:r>
           </a:p>
           <a:p>
             <a:pPr lvl="4"/>
             <a:r>
-              <a:rPr kumimoji="1" lang="ja-JP" altLang="en-US"/>
-              <a:t>第 </a:t>
-            </a:r>
-            <a:r>
-              <a:rPr kumimoji="1" lang="en-US" altLang="ja-JP"/>
-              <a:t>5 </a:t>
-            </a:r>
-            <a:r>
-              <a:rPr kumimoji="1" lang="ja-JP" altLang="en-US"/>
-              <a:t>レベル</a:t>
-            </a:r>
-          </a:p>
-        </p:txBody>
-      </p:sp>
-      <p:sp>
-        <p:nvSpPr>
-          <p:cNvPr id="5" name="テキスト プレースホルダー 4">
-            <a:extLst>
-              <a:ext uri="{FF2B5EF4-FFF2-40B4-BE49-F238E27FC236}">
-                <a16:creationId xmlns:a16="http://schemas.microsoft.com/office/drawing/2014/main" id="{93C456E8-54F2-1B55-3258-12D77DF55646}"/>
-              </a:ext>
-            </a:extLst>
-          </p:cNvPr>
+              <a:rPr lang="en-US" smtClean="0"/>
+              <a:t>Fifth level</a:t>
+            </a:r>
+            <a:endParaRPr lang="en-US"/>
+          </a:p>
+        </p:txBody>
+      </p:sp>
+      <p:sp>
+        <p:nvSpPr>
+          <p:cNvPr id="5" name="Text Placeholder 4"/>
           <p:cNvSpPr>
             <a:spLocks noGrp="1"/>
           </p:cNvSpPr>
@@ -1864,8 +1609,8 @@
         </p:nvSpPr>
         <p:spPr>
           <a:xfrm>
-            <a:off x="6172200" y="1681163"/>
-            <a:ext cx="5183188" cy="823912"/>
+            <a:off x="4645025" y="1535113"/>
+            <a:ext cx="4041775" cy="639762"/>
           </a:xfrm>
         </p:spPr>
         <p:txBody>
@@ -1911,21 +1656,15 @@
           <a:p>
             <a:pPr lvl="0"/>
             <a:r>
-              <a:rPr kumimoji="1" lang="ja-JP" altLang="en-US"/>
-              <a:t>マスター テキストの書式設定</a:t>
-            </a:r>
-          </a:p>
-        </p:txBody>
-      </p:sp>
-      <p:sp>
-        <p:nvSpPr>
-          <p:cNvPr id="6" name="コンテンツ プレースホルダー 5">
-            <a:extLst>
-              <a:ext uri="{FF2B5EF4-FFF2-40B4-BE49-F238E27FC236}">
-                <a16:creationId xmlns:a16="http://schemas.microsoft.com/office/drawing/2014/main" id="{9882FC2D-14F8-57FB-26DD-EAD043AF2186}"/>
-              </a:ext>
-            </a:extLst>
-          </p:cNvPr>
+              <a:rPr lang="en-US" smtClean="0"/>
+              <a:t>Click to edit Master text styles</a:t>
+            </a:r>
+          </a:p>
+        </p:txBody>
+      </p:sp>
+      <p:sp>
+        <p:nvSpPr>
+          <p:cNvPr id="6" name="Content Placeholder 5"/>
           <p:cNvSpPr>
             <a:spLocks noGrp="1"/>
           </p:cNvSpPr>
@@ -1935,91 +1674,82 @@
         </p:nvSpPr>
         <p:spPr>
           <a:xfrm>
-            <a:off x="6172200" y="2505075"/>
-            <a:ext cx="5183188" cy="3684588"/>
+            <a:off x="4645025" y="2174875"/>
+            <a:ext cx="4041775" cy="3951288"/>
           </a:xfrm>
         </p:spPr>
         <p:txBody>
           <a:bodyPr/>
-          <a:lstStyle/>
+          <a:lstStyle>
+            <a:lvl1pPr>
+              <a:defRPr sz="2400"/>
+            </a:lvl1pPr>
+            <a:lvl2pPr>
+              <a:defRPr sz="2000"/>
+            </a:lvl2pPr>
+            <a:lvl3pPr>
+              <a:defRPr sz="1800"/>
+            </a:lvl3pPr>
+            <a:lvl4pPr>
+              <a:defRPr sz="1600"/>
+            </a:lvl4pPr>
+            <a:lvl5pPr>
+              <a:defRPr sz="1600"/>
+            </a:lvl5pPr>
+            <a:lvl6pPr>
+              <a:defRPr sz="1600"/>
+            </a:lvl6pPr>
+            <a:lvl7pPr>
+              <a:defRPr sz="1600"/>
+            </a:lvl7pPr>
+            <a:lvl8pPr>
+              <a:defRPr sz="1600"/>
+            </a:lvl8pPr>
+            <a:lvl9pPr>
+              <a:defRPr sz="1600"/>
+            </a:lvl9pPr>
+          </a:lstStyle>
           <a:p>
             <a:pPr lvl="0"/>
             <a:r>
-              <a:rPr kumimoji="1" lang="ja-JP" altLang="en-US"/>
-              <a:t>マスター テキストの書式設定</a:t>
+              <a:rPr lang="en-US" smtClean="0"/>
+              <a:t>Click to edit Master text styles</a:t>
             </a:r>
           </a:p>
           <a:p>
             <a:pPr lvl="1"/>
             <a:r>
-              <a:rPr kumimoji="1" lang="ja-JP" altLang="en-US"/>
-              <a:t>第 </a:t>
-            </a:r>
-            <a:r>
-              <a:rPr kumimoji="1" lang="en-US" altLang="ja-JP"/>
-              <a:t>2 </a:t>
-            </a:r>
-            <a:r>
-              <a:rPr kumimoji="1" lang="ja-JP" altLang="en-US"/>
-              <a:t>レベル</a:t>
+              <a:rPr lang="en-US" smtClean="0"/>
+              <a:t>Second level</a:t>
             </a:r>
           </a:p>
           <a:p>
             <a:pPr lvl="2"/>
             <a:r>
-              <a:rPr kumimoji="1" lang="ja-JP" altLang="en-US"/>
-              <a:t>第 </a:t>
-            </a:r>
-            <a:r>
-              <a:rPr kumimoji="1" lang="en-US" altLang="ja-JP"/>
-              <a:t>3 </a:t>
-            </a:r>
-            <a:r>
-              <a:rPr kumimoji="1" lang="ja-JP" altLang="en-US"/>
-              <a:t>レベル</a:t>
+              <a:rPr lang="en-US" smtClean="0"/>
+              <a:t>Third level</a:t>
             </a:r>
           </a:p>
           <a:p>
             <a:pPr lvl="3"/>
             <a:r>
-              <a:rPr kumimoji="1" lang="ja-JP" altLang="en-US"/>
-              <a:t>第 </a:t>
-            </a:r>
-            <a:r>
-              <a:rPr kumimoji="1" lang="en-US" altLang="ja-JP"/>
-              <a:t>4 </a:t>
-            </a:r>
-            <a:r>
-              <a:rPr kumimoji="1" lang="ja-JP" altLang="en-US"/>
-              <a:t>レベル</a:t>
+              <a:rPr lang="en-US" smtClean="0"/>
+              <a:t>Fourth level</a:t>
             </a:r>
           </a:p>
           <a:p>
             <a:pPr lvl="4"/>
             <a:r>
-              <a:rPr kumimoji="1" lang="ja-JP" altLang="en-US"/>
-              <a:t>第 </a:t>
-            </a:r>
-            <a:r>
-              <a:rPr kumimoji="1" lang="en-US" altLang="ja-JP"/>
-              <a:t>5 </a:t>
-            </a:r>
-            <a:r>
-              <a:rPr kumimoji="1" lang="ja-JP" altLang="en-US"/>
-              <a:t>レベル</a:t>
-            </a:r>
-          </a:p>
-        </p:txBody>
-      </p:sp>
-      <p:sp>
-        <p:nvSpPr>
-          <p:cNvPr id="7" name="日付プレースホルダー 6">
-            <a:extLst>
-              <a:ext uri="{FF2B5EF4-FFF2-40B4-BE49-F238E27FC236}">
-                <a16:creationId xmlns:a16="http://schemas.microsoft.com/office/drawing/2014/main" id="{CDB90E8F-FC67-C75A-D5C8-3C645FD3157C}"/>
-              </a:ext>
-            </a:extLst>
-          </p:cNvPr>
+              <a:rPr lang="en-US" smtClean="0"/>
+              <a:t>Fifth level</a:t>
+            </a:r>
+            <a:endParaRPr lang="en-US"/>
+          </a:p>
+        </p:txBody>
+      </p:sp>
+      <p:sp>
+        <p:nvSpPr>
+          <p:cNvPr id="7" name="Date Placeholder 6"/>
           <p:cNvSpPr>
             <a:spLocks noGrp="1"/>
           </p:cNvSpPr>
@@ -2032,23 +1762,17 @@
           <a:bodyPr/>
           <a:lstStyle/>
           <a:p>
-            <a:fld id="{BD92BF0F-4C4E-4C20-B7A0-DBBE649AEBF0}" type="datetimeFigureOut">
-              <a:rPr kumimoji="1" lang="ja-JP" altLang="en-US" smtClean="0"/>
-              <a:t>2026/3/26</a:t>
+            <a:fld id="{5BCAD085-E8A6-8845-BD4E-CB4CCA059FC4}" type="datetimeFigureOut">
+              <a:rPr lang="en-US" smtClean="0"/>
+              <a:t>1/27/13</a:t>
             </a:fld>
-            <a:endParaRPr kumimoji="1" lang="ja-JP" altLang="en-US"/>
-          </a:p>
-        </p:txBody>
-      </p:sp>
-      <p:sp>
-        <p:nvSpPr>
-          <p:cNvPr id="8" name="フッター プレースホルダー 7">
-            <a:extLst>
-              <a:ext uri="{FF2B5EF4-FFF2-40B4-BE49-F238E27FC236}">
-                <a16:creationId xmlns:a16="http://schemas.microsoft.com/office/drawing/2014/main" id="{3EE0370F-F5E5-A358-4434-7515C1480D35}"/>
-              </a:ext>
-            </a:extLst>
-          </p:cNvPr>
+            <a:endParaRPr lang="en-US"/>
+          </a:p>
+        </p:txBody>
+      </p:sp>
+      <p:sp>
+        <p:nvSpPr>
+          <p:cNvPr id="8" name="Footer Placeholder 7"/>
           <p:cNvSpPr>
             <a:spLocks noGrp="1"/>
           </p:cNvSpPr>
@@ -2061,19 +1785,13 @@
           <a:bodyPr/>
           <a:lstStyle/>
           <a:p>
-            <a:endParaRPr kumimoji="1" lang="ja-JP" altLang="en-US"/>
-          </a:p>
-        </p:txBody>
-      </p:sp>
-      <p:sp>
-        <p:nvSpPr>
-          <p:cNvPr id="9" name="スライド番号プレースホルダー 8">
-            <a:extLst>
-              <a:ext uri="{FF2B5EF4-FFF2-40B4-BE49-F238E27FC236}">
-                <a16:creationId xmlns:a16="http://schemas.microsoft.com/office/drawing/2014/main" id="{49F68596-4893-159C-4C2A-3E7B829B97D9}"/>
-              </a:ext>
-            </a:extLst>
-          </p:cNvPr>
+            <a:endParaRPr lang="en-US"/>
+          </a:p>
+        </p:txBody>
+      </p:sp>
+      <p:sp>
+        <p:nvSpPr>
+          <p:cNvPr id="9" name="Slide Number Placeholder 8"/>
           <p:cNvSpPr>
             <a:spLocks noGrp="1"/>
           </p:cNvSpPr>
@@ -2086,18 +1804,18 @@
           <a:bodyPr/>
           <a:lstStyle/>
           <a:p>
-            <a:fld id="{261FE82B-A1D7-4DB1-A425-67003437CDD9}" type="slidenum">
-              <a:rPr kumimoji="1" lang="ja-JP" altLang="en-US" smtClean="0"/>
+            <a:fld id="{C1FF6DA9-008F-8B48-92A6-B652298478BF}" type="slidenum">
+              <a:rPr lang="en-US" smtClean="0"/>
               <a:t>‹#›</a:t>
             </a:fld>
-            <a:endParaRPr kumimoji="1" lang="ja-JP" altLang="en-US"/>
+            <a:endParaRPr lang="en-US"/>
           </a:p>
         </p:txBody>
       </p:sp>
     </p:spTree>
     <p:extLst>
       <p:ext uri="{BB962C8B-B14F-4D97-AF65-F5344CB8AC3E}">
-        <p14:creationId xmlns:p14="http://schemas.microsoft.com/office/powerpoint/2010/main" val="2685263629"/>
+        <p14:creationId xmlns:p14="http://schemas.microsoft.com/office/powerpoint/2010/main" val="990158736"/>
       </p:ext>
     </p:extLst>
   </p:cSld>
@@ -2109,7 +1827,7 @@
 
 <file path=ppt/slideLayouts/slideLayout6.xml><?xml version="1.0" encoding="utf-8"?>
 <p:sldLayout xmlns:a="http://schemas.openxmlformats.org/drawingml/2006/main" xmlns:r="http://schemas.openxmlformats.org/officeDocument/2006/relationships" xmlns:p="http://schemas.openxmlformats.org/presentationml/2006/main" type="titleOnly" preserve="1">
-  <p:cSld name="タイトルのみ">
+  <p:cSld name="Title Only">
     <p:spTree>
       <p:nvGrpSpPr>
         <p:cNvPr id="1" name=""/>
@@ -2126,13 +1844,7 @@
       </p:grpSpPr>
       <p:sp>
         <p:nvSpPr>
-          <p:cNvPr id="2" name="タイトル 1">
-            <a:extLst>
-              <a:ext uri="{FF2B5EF4-FFF2-40B4-BE49-F238E27FC236}">
-                <a16:creationId xmlns:a16="http://schemas.microsoft.com/office/drawing/2014/main" id="{A6DD11B7-6F1B-7866-62BB-9758A9D20F51}"/>
-              </a:ext>
-            </a:extLst>
-          </p:cNvPr>
+          <p:cNvPr id="2" name="Title 1"/>
           <p:cNvSpPr>
             <a:spLocks noGrp="1"/>
           </p:cNvSpPr>
@@ -2146,21 +1858,16 @@
           <a:lstStyle/>
           <a:p>
             <a:r>
-              <a:rPr kumimoji="1" lang="ja-JP" altLang="en-US"/>
-              <a:t>マスター タイトルの書式設定</a:t>
-            </a:r>
-          </a:p>
-        </p:txBody>
-      </p:sp>
-      <p:sp>
-        <p:nvSpPr>
-          <p:cNvPr id="3" name="日付プレースホルダー 2">
-            <a:extLst>
-              <a:ext uri="{FF2B5EF4-FFF2-40B4-BE49-F238E27FC236}">
-                <a16:creationId xmlns:a16="http://schemas.microsoft.com/office/drawing/2014/main" id="{F20E8490-99BD-FA9B-2C9C-DE574D326A81}"/>
-              </a:ext>
-            </a:extLst>
-          </p:cNvPr>
+              <a:rPr lang="en-US" smtClean="0"/>
+              <a:t>Click to edit Master title style</a:t>
+            </a:r>
+            <a:endParaRPr lang="en-US"/>
+          </a:p>
+        </p:txBody>
+      </p:sp>
+      <p:sp>
+        <p:nvSpPr>
+          <p:cNvPr id="3" name="Date Placeholder 2"/>
           <p:cNvSpPr>
             <a:spLocks noGrp="1"/>
           </p:cNvSpPr>
@@ -2173,23 +1880,17 @@
           <a:bodyPr/>
           <a:lstStyle/>
           <a:p>
-            <a:fld id="{BD92BF0F-4C4E-4C20-B7A0-DBBE649AEBF0}" type="datetimeFigureOut">
-              <a:rPr kumimoji="1" lang="ja-JP" altLang="en-US" smtClean="0"/>
-              <a:t>2026/3/26</a:t>
+            <a:fld id="{5BCAD085-E8A6-8845-BD4E-CB4CCA059FC4}" type="datetimeFigureOut">
+              <a:rPr lang="en-US" smtClean="0"/>
+              <a:t>1/27/13</a:t>
             </a:fld>
-            <a:endParaRPr kumimoji="1" lang="ja-JP" altLang="en-US"/>
-          </a:p>
-        </p:txBody>
-      </p:sp>
-      <p:sp>
-        <p:nvSpPr>
-          <p:cNvPr id="4" name="フッター プレースホルダー 3">
-            <a:extLst>
-              <a:ext uri="{FF2B5EF4-FFF2-40B4-BE49-F238E27FC236}">
-                <a16:creationId xmlns:a16="http://schemas.microsoft.com/office/drawing/2014/main" id="{4FCA5493-846F-678A-275B-E5E6336680BA}"/>
-              </a:ext>
-            </a:extLst>
-          </p:cNvPr>
+            <a:endParaRPr lang="en-US"/>
+          </a:p>
+        </p:txBody>
+      </p:sp>
+      <p:sp>
+        <p:nvSpPr>
+          <p:cNvPr id="4" name="Footer Placeholder 3"/>
           <p:cNvSpPr>
             <a:spLocks noGrp="1"/>
           </p:cNvSpPr>
@@ -2202,19 +1903,13 @@
           <a:bodyPr/>
           <a:lstStyle/>
           <a:p>
-            <a:endParaRPr kumimoji="1" lang="ja-JP" altLang="en-US"/>
-          </a:p>
-        </p:txBody>
-      </p:sp>
-      <p:sp>
-        <p:nvSpPr>
-          <p:cNvPr id="5" name="スライド番号プレースホルダー 4">
-            <a:extLst>
-              <a:ext uri="{FF2B5EF4-FFF2-40B4-BE49-F238E27FC236}">
-                <a16:creationId xmlns:a16="http://schemas.microsoft.com/office/drawing/2014/main" id="{5461346F-8B80-B556-6F37-B399C00C281D}"/>
-              </a:ext>
-            </a:extLst>
-          </p:cNvPr>
+            <a:endParaRPr lang="en-US"/>
+          </a:p>
+        </p:txBody>
+      </p:sp>
+      <p:sp>
+        <p:nvSpPr>
+          <p:cNvPr id="5" name="Slide Number Placeholder 4"/>
           <p:cNvSpPr>
             <a:spLocks noGrp="1"/>
           </p:cNvSpPr>
@@ -2227,18 +1922,18 @@
           <a:bodyPr/>
           <a:lstStyle/>
           <a:p>
-            <a:fld id="{261FE82B-A1D7-4DB1-A425-67003437CDD9}" type="slidenum">
-              <a:rPr kumimoji="1" lang="ja-JP" altLang="en-US" smtClean="0"/>
+            <a:fld id="{C1FF6DA9-008F-8B48-92A6-B652298478BF}" type="slidenum">
+              <a:rPr lang="en-US" smtClean="0"/>
               <a:t>‹#›</a:t>
             </a:fld>
-            <a:endParaRPr kumimoji="1" lang="ja-JP" altLang="en-US"/>
+            <a:endParaRPr lang="en-US"/>
           </a:p>
         </p:txBody>
       </p:sp>
     </p:spTree>
     <p:extLst>
       <p:ext uri="{BB962C8B-B14F-4D97-AF65-F5344CB8AC3E}">
-        <p14:creationId xmlns:p14="http://schemas.microsoft.com/office/powerpoint/2010/main" val="1788227420"/>
+        <p14:creationId xmlns:p14="http://schemas.microsoft.com/office/powerpoint/2010/main" val="727027711"/>
       </p:ext>
     </p:extLst>
   </p:cSld>
@@ -2250,7 +1945,7 @@
 
 <file path=ppt/slideLayouts/slideLayout7.xml><?xml version="1.0" encoding="utf-8"?>
 <p:sldLayout xmlns:a="http://schemas.openxmlformats.org/drawingml/2006/main" xmlns:r="http://schemas.openxmlformats.org/officeDocument/2006/relationships" xmlns:p="http://schemas.openxmlformats.org/presentationml/2006/main" type="blank" preserve="1">
-  <p:cSld name="白紙">
+  <p:cSld name="Blank">
     <p:spTree>
       <p:nvGrpSpPr>
         <p:cNvPr id="1" name=""/>
@@ -2267,13 +1962,7 @@
       </p:grpSpPr>
       <p:sp>
         <p:nvSpPr>
-          <p:cNvPr id="2" name="日付プレースホルダー 1">
-            <a:extLst>
-              <a:ext uri="{FF2B5EF4-FFF2-40B4-BE49-F238E27FC236}">
-                <a16:creationId xmlns:a16="http://schemas.microsoft.com/office/drawing/2014/main" id="{7AFCEA22-08C2-7A41-986C-45A459EB60C4}"/>
-              </a:ext>
-            </a:extLst>
-          </p:cNvPr>
+          <p:cNvPr id="2" name="Date Placeholder 1"/>
           <p:cNvSpPr>
             <a:spLocks noGrp="1"/>
           </p:cNvSpPr>
@@ -2286,23 +1975,17 @@
           <a:bodyPr/>
           <a:lstStyle/>
           <a:p>
-            <a:fld id="{BD92BF0F-4C4E-4C20-B7A0-DBBE649AEBF0}" type="datetimeFigureOut">
-              <a:rPr kumimoji="1" lang="ja-JP" altLang="en-US" smtClean="0"/>
-              <a:t>2026/3/26</a:t>
+            <a:fld id="{5BCAD085-E8A6-8845-BD4E-CB4CCA059FC4}" type="datetimeFigureOut">
+              <a:rPr lang="en-US" smtClean="0"/>
+              <a:t>1/27/13</a:t>
             </a:fld>
-            <a:endParaRPr kumimoji="1" lang="ja-JP" altLang="en-US"/>
-          </a:p>
-        </p:txBody>
-      </p:sp>
-      <p:sp>
-        <p:nvSpPr>
-          <p:cNvPr id="3" name="フッター プレースホルダー 2">
-            <a:extLst>
-              <a:ext uri="{FF2B5EF4-FFF2-40B4-BE49-F238E27FC236}">
-                <a16:creationId xmlns:a16="http://schemas.microsoft.com/office/drawing/2014/main" id="{0DCEDDF2-E80A-1D04-F03E-3FBDBCD215D2}"/>
-              </a:ext>
-            </a:extLst>
-          </p:cNvPr>
+            <a:endParaRPr lang="en-US"/>
+          </a:p>
+        </p:txBody>
+      </p:sp>
+      <p:sp>
+        <p:nvSpPr>
+          <p:cNvPr id="3" name="Footer Placeholder 2"/>
           <p:cNvSpPr>
             <a:spLocks noGrp="1"/>
           </p:cNvSpPr>
@@ -2315,19 +1998,13 @@
           <a:bodyPr/>
           <a:lstStyle/>
           <a:p>
-            <a:endParaRPr kumimoji="1" lang="ja-JP" altLang="en-US"/>
-          </a:p>
-        </p:txBody>
-      </p:sp>
-      <p:sp>
-        <p:nvSpPr>
-          <p:cNvPr id="4" name="スライド番号プレースホルダー 3">
-            <a:extLst>
-              <a:ext uri="{FF2B5EF4-FFF2-40B4-BE49-F238E27FC236}">
-                <a16:creationId xmlns:a16="http://schemas.microsoft.com/office/drawing/2014/main" id="{160C4A85-1A77-EE01-D351-5B7CFF71C48B}"/>
-              </a:ext>
-            </a:extLst>
-          </p:cNvPr>
+            <a:endParaRPr lang="en-US"/>
+          </a:p>
+        </p:txBody>
+      </p:sp>
+      <p:sp>
+        <p:nvSpPr>
+          <p:cNvPr id="4" name="Slide Number Placeholder 3"/>
           <p:cNvSpPr>
             <a:spLocks noGrp="1"/>
           </p:cNvSpPr>
@@ -2340,18 +2017,18 @@
           <a:bodyPr/>
           <a:lstStyle/>
           <a:p>
-            <a:fld id="{261FE82B-A1D7-4DB1-A425-67003437CDD9}" type="slidenum">
-              <a:rPr kumimoji="1" lang="ja-JP" altLang="en-US" smtClean="0"/>
+            <a:fld id="{C1FF6DA9-008F-8B48-92A6-B652298478BF}" type="slidenum">
+              <a:rPr lang="en-US" smtClean="0"/>
               <a:t>‹#›</a:t>
             </a:fld>
-            <a:endParaRPr kumimoji="1" lang="ja-JP" altLang="en-US"/>
+            <a:endParaRPr lang="en-US"/>
           </a:p>
         </p:txBody>
       </p:sp>
     </p:spTree>
     <p:extLst>
       <p:ext uri="{BB962C8B-B14F-4D97-AF65-F5344CB8AC3E}">
-        <p14:creationId xmlns:p14="http://schemas.microsoft.com/office/powerpoint/2010/main" val="3307337439"/>
+        <p14:creationId xmlns:p14="http://schemas.microsoft.com/office/powerpoint/2010/main" val="1212999818"/>
       </p:ext>
     </p:extLst>
   </p:cSld>
@@ -2363,7 +2040,7 @@
 
 <file path=ppt/slideLayouts/slideLayout8.xml><?xml version="1.0" encoding="utf-8"?>
 <p:sldLayout xmlns:a="http://schemas.openxmlformats.org/drawingml/2006/main" xmlns:r="http://schemas.openxmlformats.org/officeDocument/2006/relationships" xmlns:p="http://schemas.openxmlformats.org/presentationml/2006/main" type="objTx" preserve="1">
-  <p:cSld name="タイトル付きのコンテンツ">
+  <p:cSld name="Content with Caption">
     <p:spTree>
       <p:nvGrpSpPr>
         <p:cNvPr id="1" name=""/>
@@ -2380,13 +2057,7 @@
       </p:grpSpPr>
       <p:sp>
         <p:nvSpPr>
-          <p:cNvPr id="2" name="タイトル 1">
-            <a:extLst>
-              <a:ext uri="{FF2B5EF4-FFF2-40B4-BE49-F238E27FC236}">
-                <a16:creationId xmlns:a16="http://schemas.microsoft.com/office/drawing/2014/main" id="{A9FA729D-9B80-C64C-F8D9-2E00FDAEA2B1}"/>
-              </a:ext>
-            </a:extLst>
-          </p:cNvPr>
+          <p:cNvPr id="2" name="Title 1"/>
           <p:cNvSpPr>
             <a:spLocks noGrp="1"/>
           </p:cNvSpPr>
@@ -2396,34 +2067,29 @@
         </p:nvSpPr>
         <p:spPr>
           <a:xfrm>
-            <a:off x="839788" y="457200"/>
-            <a:ext cx="3932237" cy="1600200"/>
+            <a:off x="457200" y="273050"/>
+            <a:ext cx="3008313" cy="1162050"/>
           </a:xfrm>
         </p:spPr>
         <p:txBody>
           <a:bodyPr anchor="b"/>
           <a:lstStyle>
-            <a:lvl1pPr>
-              <a:defRPr sz="3200"/>
+            <a:lvl1pPr algn="l">
+              <a:defRPr sz="2000" b="1"/>
             </a:lvl1pPr>
           </a:lstStyle>
           <a:p>
             <a:r>
-              <a:rPr kumimoji="1" lang="ja-JP" altLang="en-US"/>
-              <a:t>マスター タイトルの書式設定</a:t>
-            </a:r>
-          </a:p>
-        </p:txBody>
-      </p:sp>
-      <p:sp>
-        <p:nvSpPr>
-          <p:cNvPr id="3" name="コンテンツ プレースホルダー 2">
-            <a:extLst>
-              <a:ext uri="{FF2B5EF4-FFF2-40B4-BE49-F238E27FC236}">
-                <a16:creationId xmlns:a16="http://schemas.microsoft.com/office/drawing/2014/main" id="{1C6C049E-212F-7B7E-19A3-720335B899C2}"/>
-              </a:ext>
-            </a:extLst>
-          </p:cNvPr>
+              <a:rPr lang="en-US" smtClean="0"/>
+              <a:t>Click to edit Master title style</a:t>
+            </a:r>
+            <a:endParaRPr lang="en-US"/>
+          </a:p>
+        </p:txBody>
+      </p:sp>
+      <p:sp>
+        <p:nvSpPr>
+          <p:cNvPr id="3" name="Content Placeholder 2"/>
           <p:cNvSpPr>
             <a:spLocks noGrp="1"/>
           </p:cNvSpPr>
@@ -2433,8 +2099,8 @@
         </p:nvSpPr>
         <p:spPr>
           <a:xfrm>
-            <a:off x="5183188" y="987425"/>
-            <a:ext cx="6172200" cy="4873625"/>
+            <a:off x="3575050" y="273050"/>
+            <a:ext cx="5111750" cy="5853113"/>
           </a:xfrm>
         </p:spPr>
         <p:txBody>
@@ -2471,81 +2137,44 @@
           <a:p>
             <a:pPr lvl="0"/>
             <a:r>
-              <a:rPr kumimoji="1" lang="ja-JP" altLang="en-US"/>
-              <a:t>マスター テキストの書式設定</a:t>
+              <a:rPr lang="en-US" smtClean="0"/>
+              <a:t>Click to edit Master text styles</a:t>
             </a:r>
           </a:p>
           <a:p>
             <a:pPr lvl="1"/>
             <a:r>
-              <a:rPr kumimoji="1" lang="ja-JP" altLang="en-US"/>
-              <a:t>第 </a:t>
-            </a:r>
-            <a:r>
-              <a:rPr kumimoji="1" lang="en-US" altLang="ja-JP"/>
-              <a:t>2 </a:t>
-            </a:r>
-            <a:r>
-              <a:rPr kumimoji="1" lang="ja-JP" altLang="en-US"/>
-              <a:t>レベル</a:t>
+              <a:rPr lang="en-US" smtClean="0"/>
+              <a:t>Second level</a:t>
             </a:r>
           </a:p>
           <a:p>
             <a:pPr lvl="2"/>
             <a:r>
-              <a:rPr kumimoji="1" lang="ja-JP" altLang="en-US"/>
-              <a:t>第 </a:t>
-            </a:r>
-            <a:r>
-              <a:rPr kumimoji="1" lang="en-US" altLang="ja-JP"/>
-              <a:t>3 </a:t>
-            </a:r>
-            <a:r>
-              <a:rPr kumimoji="1" lang="ja-JP" altLang="en-US"/>
-              <a:t>レベル</a:t>
+              <a:rPr lang="en-US" smtClean="0"/>
+              <a:t>Third level</a:t>
             </a:r>
           </a:p>
           <a:p>
             <a:pPr lvl="3"/>
             <a:r>
-              <a:rPr kumimoji="1" lang="ja-JP" altLang="en-US"/>
-              <a:t>第 </a:t>
-            </a:r>
-            <a:r>
-              <a:rPr kumimoji="1" lang="en-US" altLang="ja-JP"/>
-              <a:t>4 </a:t>
-            </a:r>
-            <a:r>
-              <a:rPr kumimoji="1" lang="ja-JP" altLang="en-US"/>
-              <a:t>レベル</a:t>
+              <a:rPr lang="en-US" smtClean="0"/>
+              <a:t>Fourth level</a:t>
             </a:r>
           </a:p>
           <a:p>
             <a:pPr lvl="4"/>
             <a:r>
-              <a:rPr kumimoji="1" lang="ja-JP" altLang="en-US"/>
-              <a:t>第 </a:t>
-            </a:r>
-            <a:r>
-              <a:rPr kumimoji="1" lang="en-US" altLang="ja-JP"/>
-              <a:t>5 </a:t>
-            </a:r>
-            <a:r>
-              <a:rPr kumimoji="1" lang="ja-JP" altLang="en-US"/>
-              <a:t>レベル</a:t>
-            </a:r>
-          </a:p>
-        </p:txBody>
-      </p:sp>
-      <p:sp>
-        <p:nvSpPr>
-          <p:cNvPr id="4" name="テキスト プレースホルダー 3">
-            <a:extLst>
-              <a:ext uri="{FF2B5EF4-FFF2-40B4-BE49-F238E27FC236}">
-                <a16:creationId xmlns:a16="http://schemas.microsoft.com/office/drawing/2014/main" id="{67B7320E-DB16-CD19-3A99-2EB5AA625FC8}"/>
-              </a:ext>
-            </a:extLst>
-          </p:cNvPr>
+              <a:rPr lang="en-US" smtClean="0"/>
+              <a:t>Fifth level</a:t>
+            </a:r>
+            <a:endParaRPr lang="en-US"/>
+          </a:p>
+        </p:txBody>
+      </p:sp>
+      <p:sp>
+        <p:nvSpPr>
+          <p:cNvPr id="4" name="Text Placeholder 3"/>
           <p:cNvSpPr>
             <a:spLocks noGrp="1"/>
           </p:cNvSpPr>
@@ -2555,8 +2184,8 @@
         </p:nvSpPr>
         <p:spPr>
           <a:xfrm>
-            <a:off x="839788" y="2057400"/>
-            <a:ext cx="3932237" cy="3811588"/>
+            <a:off x="457200" y="1435100"/>
+            <a:ext cx="3008313" cy="4691063"/>
           </a:xfrm>
         </p:spPr>
         <p:txBody>
@@ -2564,59 +2193,53 @@
           <a:lstStyle>
             <a:lvl1pPr marL="0" indent="0">
               <a:buNone/>
-              <a:defRPr sz="1600"/>
+              <a:defRPr sz="1400"/>
             </a:lvl1pPr>
             <a:lvl2pPr marL="457200" indent="0">
               <a:buNone/>
-              <a:defRPr sz="1400"/>
+              <a:defRPr sz="1200"/>
             </a:lvl2pPr>
             <a:lvl3pPr marL="914400" indent="0">
               <a:buNone/>
-              <a:defRPr sz="1200"/>
+              <a:defRPr sz="1000"/>
             </a:lvl3pPr>
             <a:lvl4pPr marL="1371600" indent="0">
               <a:buNone/>
-              <a:defRPr sz="1000"/>
+              <a:defRPr sz="900"/>
             </a:lvl4pPr>
             <a:lvl5pPr marL="1828800" indent="0">
               <a:buNone/>
-              <a:defRPr sz="1000"/>
+              <a:defRPr sz="900"/>
             </a:lvl5pPr>
             <a:lvl6pPr marL="2286000" indent="0">
               <a:buNone/>
-              <a:defRPr sz="1000"/>
+              <a:defRPr sz="900"/>
             </a:lvl6pPr>
             <a:lvl7pPr marL="2743200" indent="0">
               <a:buNone/>
-              <a:defRPr sz="1000"/>
+              <a:defRPr sz="900"/>
             </a:lvl7pPr>
             <a:lvl8pPr marL="3200400" indent="0">
               <a:buNone/>
-              <a:defRPr sz="1000"/>
+              <a:defRPr sz="900"/>
             </a:lvl8pPr>
             <a:lvl9pPr marL="3657600" indent="0">
               <a:buNone/>
-              <a:defRPr sz="1000"/>
+              <a:defRPr sz="900"/>
             </a:lvl9pPr>
           </a:lstStyle>
           <a:p>
             <a:pPr lvl="0"/>
             <a:r>
-              <a:rPr kumimoji="1" lang="ja-JP" altLang="en-US"/>
-              <a:t>マスター テキストの書式設定</a:t>
-            </a:r>
-          </a:p>
-        </p:txBody>
-      </p:sp>
-      <p:sp>
-        <p:nvSpPr>
-          <p:cNvPr id="5" name="日付プレースホルダー 4">
-            <a:extLst>
-              <a:ext uri="{FF2B5EF4-FFF2-40B4-BE49-F238E27FC236}">
-                <a16:creationId xmlns:a16="http://schemas.microsoft.com/office/drawing/2014/main" id="{08CB56C5-945E-4860-6962-52AB09A771F2}"/>
-              </a:ext>
-            </a:extLst>
-          </p:cNvPr>
+              <a:rPr lang="en-US" smtClean="0"/>
+              <a:t>Click to edit Master text styles</a:t>
+            </a:r>
+          </a:p>
+        </p:txBody>
+      </p:sp>
+      <p:sp>
+        <p:nvSpPr>
+          <p:cNvPr id="5" name="Date Placeholder 4"/>
           <p:cNvSpPr>
             <a:spLocks noGrp="1"/>
           </p:cNvSpPr>
@@ -2629,23 +2252,17 @@
           <a:bodyPr/>
           <a:lstStyle/>
           <a:p>
-            <a:fld id="{BD92BF0F-4C4E-4C20-B7A0-DBBE649AEBF0}" type="datetimeFigureOut">
-              <a:rPr kumimoji="1" lang="ja-JP" altLang="en-US" smtClean="0"/>
-              <a:t>2026/3/26</a:t>
+            <a:fld id="{5BCAD085-E8A6-8845-BD4E-CB4CCA059FC4}" type="datetimeFigureOut">
+              <a:rPr lang="en-US" smtClean="0"/>
+              <a:t>1/27/13</a:t>
             </a:fld>
-            <a:endParaRPr kumimoji="1" lang="ja-JP" altLang="en-US"/>
-          </a:p>
-        </p:txBody>
-      </p:sp>
-      <p:sp>
-        <p:nvSpPr>
-          <p:cNvPr id="6" name="フッター プレースホルダー 5">
-            <a:extLst>
-              <a:ext uri="{FF2B5EF4-FFF2-40B4-BE49-F238E27FC236}">
-                <a16:creationId xmlns:a16="http://schemas.microsoft.com/office/drawing/2014/main" id="{1834E892-635E-ACBE-6CC1-E7CC9CC37EA3}"/>
-              </a:ext>
-            </a:extLst>
-          </p:cNvPr>
+            <a:endParaRPr lang="en-US"/>
+          </a:p>
+        </p:txBody>
+      </p:sp>
+      <p:sp>
+        <p:nvSpPr>
+          <p:cNvPr id="6" name="Footer Placeholder 5"/>
           <p:cNvSpPr>
             <a:spLocks noGrp="1"/>
           </p:cNvSpPr>
@@ -2658,19 +2275,13 @@
           <a:bodyPr/>
           <a:lstStyle/>
           <a:p>
-            <a:endParaRPr kumimoji="1" lang="ja-JP" altLang="en-US"/>
-          </a:p>
-        </p:txBody>
-      </p:sp>
-      <p:sp>
-        <p:nvSpPr>
-          <p:cNvPr id="7" name="スライド番号プレースホルダー 6">
-            <a:extLst>
-              <a:ext uri="{FF2B5EF4-FFF2-40B4-BE49-F238E27FC236}">
-                <a16:creationId xmlns:a16="http://schemas.microsoft.com/office/drawing/2014/main" id="{768FAFEC-C489-BEA0-48B5-013BD2511283}"/>
-              </a:ext>
-            </a:extLst>
-          </p:cNvPr>
+            <a:endParaRPr lang="en-US"/>
+          </a:p>
+        </p:txBody>
+      </p:sp>
+      <p:sp>
+        <p:nvSpPr>
+          <p:cNvPr id="7" name="Slide Number Placeholder 6"/>
           <p:cNvSpPr>
             <a:spLocks noGrp="1"/>
           </p:cNvSpPr>
@@ -2683,18 +2294,18 @@
           <a:bodyPr/>
           <a:lstStyle/>
           <a:p>
-            <a:fld id="{261FE82B-A1D7-4DB1-A425-67003437CDD9}" type="slidenum">
-              <a:rPr kumimoji="1" lang="ja-JP" altLang="en-US" smtClean="0"/>
+            <a:fld id="{C1FF6DA9-008F-8B48-92A6-B652298478BF}" type="slidenum">
+              <a:rPr lang="en-US" smtClean="0"/>
               <a:t>‹#›</a:t>
             </a:fld>
-            <a:endParaRPr kumimoji="1" lang="ja-JP" altLang="en-US"/>
+            <a:endParaRPr lang="en-US"/>
           </a:p>
         </p:txBody>
       </p:sp>
     </p:spTree>
     <p:extLst>
       <p:ext uri="{BB962C8B-B14F-4D97-AF65-F5344CB8AC3E}">
-        <p14:creationId xmlns:p14="http://schemas.microsoft.com/office/powerpoint/2010/main" val="4067433928"/>
+        <p14:creationId xmlns:p14="http://schemas.microsoft.com/office/powerpoint/2010/main" val="1840726560"/>
       </p:ext>
     </p:extLst>
   </p:cSld>
@@ -2706,7 +2317,7 @@
 
 <file path=ppt/slideLayouts/slideLayout9.xml><?xml version="1.0" encoding="utf-8"?>
 <p:sldLayout xmlns:a="http://schemas.openxmlformats.org/drawingml/2006/main" xmlns:r="http://schemas.openxmlformats.org/officeDocument/2006/relationships" xmlns:p="http://schemas.openxmlformats.org/presentationml/2006/main" type="picTx" preserve="1">
-  <p:cSld name="タイトル付きの図">
+  <p:cSld name="Picture with Caption">
     <p:spTree>
       <p:nvGrpSpPr>
         <p:cNvPr id="1" name=""/>
@@ -2723,13 +2334,7 @@
       </p:grpSpPr>
       <p:sp>
         <p:nvSpPr>
-          <p:cNvPr id="2" name="タイトル 1">
-            <a:extLst>
-              <a:ext uri="{FF2B5EF4-FFF2-40B4-BE49-F238E27FC236}">
-                <a16:creationId xmlns:a16="http://schemas.microsoft.com/office/drawing/2014/main" id="{7D860A2A-4827-9764-0A9F-5FECD333ED7A}"/>
-              </a:ext>
-            </a:extLst>
-          </p:cNvPr>
+          <p:cNvPr id="2" name="Title 1"/>
           <p:cNvSpPr>
             <a:spLocks noGrp="1"/>
           </p:cNvSpPr>
@@ -2739,34 +2344,29 @@
         </p:nvSpPr>
         <p:spPr>
           <a:xfrm>
-            <a:off x="839788" y="457200"/>
-            <a:ext cx="3932237" cy="1600200"/>
+            <a:off x="1792288" y="4800600"/>
+            <a:ext cx="5486400" cy="566738"/>
           </a:xfrm>
         </p:spPr>
         <p:txBody>
           <a:bodyPr anchor="b"/>
           <a:lstStyle>
-            <a:lvl1pPr>
-              <a:defRPr sz="3200"/>
+            <a:lvl1pPr algn="l">
+              <a:defRPr sz="2000" b="1"/>
             </a:lvl1pPr>
           </a:lstStyle>
           <a:p>
             <a:r>
-              <a:rPr kumimoji="1" lang="ja-JP" altLang="en-US"/>
-              <a:t>マスター タイトルの書式設定</a:t>
-            </a:r>
-          </a:p>
-        </p:txBody>
-      </p:sp>
-      <p:sp>
-        <p:nvSpPr>
-          <p:cNvPr id="3" name="図プレースホルダー 2">
-            <a:extLst>
-              <a:ext uri="{FF2B5EF4-FFF2-40B4-BE49-F238E27FC236}">
-                <a16:creationId xmlns:a16="http://schemas.microsoft.com/office/drawing/2014/main" id="{63E0FD7E-1EC8-AF77-F907-59A5372E1645}"/>
-              </a:ext>
-            </a:extLst>
-          </p:cNvPr>
+              <a:rPr lang="en-US" smtClean="0"/>
+              <a:t>Click to edit Master title style</a:t>
+            </a:r>
+            <a:endParaRPr lang="en-US"/>
+          </a:p>
+        </p:txBody>
+      </p:sp>
+      <p:sp>
+        <p:nvSpPr>
+          <p:cNvPr id="3" name="Picture Placeholder 2"/>
           <p:cNvSpPr>
             <a:spLocks noGrp="1"/>
           </p:cNvSpPr>
@@ -2776,8 +2376,8 @@
         </p:nvSpPr>
         <p:spPr>
           <a:xfrm>
-            <a:off x="5183188" y="987425"/>
-            <a:ext cx="6172200" cy="4873625"/>
+            <a:off x="1792288" y="612775"/>
+            <a:ext cx="5486400" cy="4114800"/>
           </a:xfrm>
         </p:spPr>
         <p:txBody>
@@ -2821,19 +2421,13 @@
             </a:lvl9pPr>
           </a:lstStyle>
           <a:p>
-            <a:endParaRPr kumimoji="1" lang="ja-JP" altLang="en-US"/>
-          </a:p>
-        </p:txBody>
-      </p:sp>
-      <p:sp>
-        <p:nvSpPr>
-          <p:cNvPr id="4" name="テキスト プレースホルダー 3">
-            <a:extLst>
-              <a:ext uri="{FF2B5EF4-FFF2-40B4-BE49-F238E27FC236}">
-                <a16:creationId xmlns:a16="http://schemas.microsoft.com/office/drawing/2014/main" id="{AEA551E6-F0BC-81E3-F7E9-755A6AC88DCD}"/>
-              </a:ext>
-            </a:extLst>
-          </p:cNvPr>
+            <a:endParaRPr lang="en-US"/>
+          </a:p>
+        </p:txBody>
+      </p:sp>
+      <p:sp>
+        <p:nvSpPr>
+          <p:cNvPr id="4" name="Text Placeholder 3"/>
           <p:cNvSpPr>
             <a:spLocks noGrp="1"/>
           </p:cNvSpPr>
@@ -2843,8 +2437,8 @@
         </p:nvSpPr>
         <p:spPr>
           <a:xfrm>
-            <a:off x="839788" y="2057400"/>
-            <a:ext cx="3932237" cy="3811588"/>
+            <a:off x="1792288" y="5367338"/>
+            <a:ext cx="5486400" cy="804862"/>
           </a:xfrm>
         </p:spPr>
         <p:txBody>
@@ -2852,59 +2446,53 @@
           <a:lstStyle>
             <a:lvl1pPr marL="0" indent="0">
               <a:buNone/>
-              <a:defRPr sz="1600"/>
+              <a:defRPr sz="1400"/>
             </a:lvl1pPr>
             <a:lvl2pPr marL="457200" indent="0">
               <a:buNone/>
-              <a:defRPr sz="1400"/>
+              <a:defRPr sz="1200"/>
             </a:lvl2pPr>
             <a:lvl3pPr marL="914400" indent="0">
               <a:buNone/>
-              <a:defRPr sz="1200"/>
+              <a:defRPr sz="1000"/>
             </a:lvl3pPr>
             <a:lvl4pPr marL="1371600" indent="0">
               <a:buNone/>
-              <a:defRPr sz="1000"/>
+              <a:defRPr sz="900"/>
             </a:lvl4pPr>
             <a:lvl5pPr marL="1828800" indent="0">
               <a:buNone/>
-              <a:defRPr sz="1000"/>
+              <a:defRPr sz="900"/>
             </a:lvl5pPr>
             <a:lvl6pPr marL="2286000" indent="0">
               <a:buNone/>
-              <a:defRPr sz="1000"/>
+              <a:defRPr sz="900"/>
             </a:lvl6pPr>
             <a:lvl7pPr marL="2743200" indent="0">
               <a:buNone/>
-              <a:defRPr sz="1000"/>
+              <a:defRPr sz="900"/>
             </a:lvl7pPr>
             <a:lvl8pPr marL="3200400" indent="0">
               <a:buNone/>
-              <a:defRPr sz="1000"/>
+              <a:defRPr sz="900"/>
             </a:lvl8pPr>
             <a:lvl9pPr marL="3657600" indent="0">
               <a:buNone/>
-              <a:defRPr sz="1000"/>
+              <a:defRPr sz="900"/>
             </a:lvl9pPr>
           </a:lstStyle>
           <a:p>
             <a:pPr lvl="0"/>
             <a:r>
-              <a:rPr kumimoji="1" lang="ja-JP" altLang="en-US"/>
-              <a:t>マスター テキストの書式設定</a:t>
-            </a:r>
-          </a:p>
-        </p:txBody>
-      </p:sp>
-      <p:sp>
-        <p:nvSpPr>
-          <p:cNvPr id="5" name="日付プレースホルダー 4">
-            <a:extLst>
-              <a:ext uri="{FF2B5EF4-FFF2-40B4-BE49-F238E27FC236}">
-                <a16:creationId xmlns:a16="http://schemas.microsoft.com/office/drawing/2014/main" id="{A7372CFF-ABEF-4F1F-C588-DBAB083ECA19}"/>
-              </a:ext>
-            </a:extLst>
-          </p:cNvPr>
+              <a:rPr lang="en-US" smtClean="0"/>
+              <a:t>Click to edit Master text styles</a:t>
+            </a:r>
+          </a:p>
+        </p:txBody>
+      </p:sp>
+      <p:sp>
+        <p:nvSpPr>
+          <p:cNvPr id="5" name="Date Placeholder 4"/>
           <p:cNvSpPr>
             <a:spLocks noGrp="1"/>
           </p:cNvSpPr>
@@ -2917,23 +2505,17 @@
           <a:bodyPr/>
           <a:lstStyle/>
           <a:p>
-            <a:fld id="{BD92BF0F-4C4E-4C20-B7A0-DBBE649AEBF0}" type="datetimeFigureOut">
-              <a:rPr kumimoji="1" lang="ja-JP" altLang="en-US" smtClean="0"/>
-              <a:t>2026/3/26</a:t>
+            <a:fld id="{5BCAD085-E8A6-8845-BD4E-CB4CCA059FC4}" type="datetimeFigureOut">
+              <a:rPr lang="en-US" smtClean="0"/>
+              <a:t>1/27/13</a:t>
             </a:fld>
-            <a:endParaRPr kumimoji="1" lang="ja-JP" altLang="en-US"/>
-          </a:p>
-        </p:txBody>
-      </p:sp>
-      <p:sp>
-        <p:nvSpPr>
-          <p:cNvPr id="6" name="フッター プレースホルダー 5">
-            <a:extLst>
-              <a:ext uri="{FF2B5EF4-FFF2-40B4-BE49-F238E27FC236}">
-                <a16:creationId xmlns:a16="http://schemas.microsoft.com/office/drawing/2014/main" id="{2CFD42AC-3BFD-C7E2-79E2-54940DBB257B}"/>
-              </a:ext>
-            </a:extLst>
-          </p:cNvPr>
+            <a:endParaRPr lang="en-US"/>
+          </a:p>
+        </p:txBody>
+      </p:sp>
+      <p:sp>
+        <p:nvSpPr>
+          <p:cNvPr id="6" name="Footer Placeholder 5"/>
           <p:cNvSpPr>
             <a:spLocks noGrp="1"/>
           </p:cNvSpPr>
@@ -2946,19 +2528,13 @@
           <a:bodyPr/>
           <a:lstStyle/>
           <a:p>
-            <a:endParaRPr kumimoji="1" lang="ja-JP" altLang="en-US"/>
-          </a:p>
-        </p:txBody>
-      </p:sp>
-      <p:sp>
-        <p:nvSpPr>
-          <p:cNvPr id="7" name="スライド番号プレースホルダー 6">
-            <a:extLst>
-              <a:ext uri="{FF2B5EF4-FFF2-40B4-BE49-F238E27FC236}">
-                <a16:creationId xmlns:a16="http://schemas.microsoft.com/office/drawing/2014/main" id="{9EC18B67-9605-4E17-A283-15AB9B31B70B}"/>
-              </a:ext>
-            </a:extLst>
-          </p:cNvPr>
+            <a:endParaRPr lang="en-US"/>
+          </a:p>
+        </p:txBody>
+      </p:sp>
+      <p:sp>
+        <p:nvSpPr>
+          <p:cNvPr id="7" name="Slide Number Placeholder 6"/>
           <p:cNvSpPr>
             <a:spLocks noGrp="1"/>
           </p:cNvSpPr>
@@ -2971,18 +2547,18 @@
           <a:bodyPr/>
           <a:lstStyle/>
           <a:p>
-            <a:fld id="{261FE82B-A1D7-4DB1-A425-67003437CDD9}" type="slidenum">
-              <a:rPr kumimoji="1" lang="ja-JP" altLang="en-US" smtClean="0"/>
+            <a:fld id="{C1FF6DA9-008F-8B48-92A6-B652298478BF}" type="slidenum">
+              <a:rPr lang="en-US" smtClean="0"/>
               <a:t>‹#›</a:t>
             </a:fld>
-            <a:endParaRPr kumimoji="1" lang="ja-JP" altLang="en-US"/>
+            <a:endParaRPr lang="en-US"/>
           </a:p>
         </p:txBody>
       </p:sp>
     </p:spTree>
     <p:extLst>
       <p:ext uri="{BB962C8B-B14F-4D97-AF65-F5344CB8AC3E}">
-        <p14:creationId xmlns:p14="http://schemas.microsoft.com/office/powerpoint/2010/main" val="3593655516"/>
+        <p14:creationId xmlns:p14="http://schemas.microsoft.com/office/powerpoint/2010/main" val="3889236939"/>
       </p:ext>
     </p:extLst>
   </p:cSld>
@@ -3016,13 +2592,7 @@
       </p:grpSpPr>
       <p:sp>
         <p:nvSpPr>
-          <p:cNvPr id="2" name="タイトル プレースホルダー 1">
-            <a:extLst>
-              <a:ext uri="{FF2B5EF4-FFF2-40B4-BE49-F238E27FC236}">
-                <a16:creationId xmlns:a16="http://schemas.microsoft.com/office/drawing/2014/main" id="{F00508FD-2C25-9551-BA42-623F9346A87A}"/>
-              </a:ext>
-            </a:extLst>
-          </p:cNvPr>
+          <p:cNvPr id="2" name="Title Placeholder 1"/>
           <p:cNvSpPr>
             <a:spLocks noGrp="1"/>
           </p:cNvSpPr>
@@ -3032,8 +2602,8 @@
         </p:nvSpPr>
         <p:spPr>
           <a:xfrm>
-            <a:off x="838200" y="365125"/>
-            <a:ext cx="10515600" cy="1325563"/>
+            <a:off x="457200" y="274638"/>
+            <a:ext cx="8229600" cy="1143000"/>
           </a:xfrm>
           <a:prstGeom prst="rect">
             <a:avLst/>
@@ -3046,21 +2616,16 @@
           <a:lstStyle/>
           <a:p>
             <a:r>
-              <a:rPr kumimoji="1" lang="ja-JP" altLang="en-US"/>
-              <a:t>マスター タイトルの書式設定</a:t>
-            </a:r>
-          </a:p>
-        </p:txBody>
-      </p:sp>
-      <p:sp>
-        <p:nvSpPr>
-          <p:cNvPr id="3" name="テキスト プレースホルダー 2">
-            <a:extLst>
-              <a:ext uri="{FF2B5EF4-FFF2-40B4-BE49-F238E27FC236}">
-                <a16:creationId xmlns:a16="http://schemas.microsoft.com/office/drawing/2014/main" id="{3A18D9AB-3577-CECD-743A-08057620EDCA}"/>
-              </a:ext>
-            </a:extLst>
-          </p:cNvPr>
+              <a:rPr lang="en-US" smtClean="0"/>
+              <a:t>Click to edit Master title style</a:t>
+            </a:r>
+            <a:endParaRPr lang="en-US"/>
+          </a:p>
+        </p:txBody>
+      </p:sp>
+      <p:sp>
+        <p:nvSpPr>
+          <p:cNvPr id="3" name="Text Placeholder 2"/>
           <p:cNvSpPr>
             <a:spLocks noGrp="1"/>
           </p:cNvSpPr>
@@ -3070,8 +2635,8 @@
         </p:nvSpPr>
         <p:spPr>
           <a:xfrm>
-            <a:off x="838200" y="1825625"/>
-            <a:ext cx="10515600" cy="4351338"/>
+            <a:off x="457200" y="1600200"/>
+            <a:ext cx="8229600" cy="4525963"/>
           </a:xfrm>
           <a:prstGeom prst="rect">
             <a:avLst/>
@@ -3085,81 +2650,44 @@
           <a:p>
             <a:pPr lvl="0"/>
             <a:r>
-              <a:rPr kumimoji="1" lang="ja-JP" altLang="en-US"/>
-              <a:t>マスター テキストの書式設定</a:t>
+              <a:rPr lang="en-US" smtClean="0"/>
+              <a:t>Click to edit Master text styles</a:t>
             </a:r>
           </a:p>
           <a:p>
             <a:pPr lvl="1"/>
             <a:r>
-              <a:rPr kumimoji="1" lang="ja-JP" altLang="en-US"/>
-              <a:t>第 </a:t>
-            </a:r>
-            <a:r>
-              <a:rPr kumimoji="1" lang="en-US" altLang="ja-JP"/>
-              <a:t>2 </a:t>
-            </a:r>
-            <a:r>
-              <a:rPr kumimoji="1" lang="ja-JP" altLang="en-US"/>
-              <a:t>レベル</a:t>
+              <a:rPr lang="en-US" smtClean="0"/>
+              <a:t>Second level</a:t>
             </a:r>
           </a:p>
           <a:p>
             <a:pPr lvl="2"/>
             <a:r>
-              <a:rPr kumimoji="1" lang="ja-JP" altLang="en-US"/>
-              <a:t>第 </a:t>
-            </a:r>
-            <a:r>
-              <a:rPr kumimoji="1" lang="en-US" altLang="ja-JP"/>
-              <a:t>3 </a:t>
-            </a:r>
-            <a:r>
-              <a:rPr kumimoji="1" lang="ja-JP" altLang="en-US"/>
-              <a:t>レベル</a:t>
+              <a:rPr lang="en-US" smtClean="0"/>
+              <a:t>Third level</a:t>
             </a:r>
           </a:p>
           <a:p>
             <a:pPr lvl="3"/>
             <a:r>
-              <a:rPr kumimoji="1" lang="ja-JP" altLang="en-US"/>
-              <a:t>第 </a:t>
-            </a:r>
-            <a:r>
-              <a:rPr kumimoji="1" lang="en-US" altLang="ja-JP"/>
-              <a:t>4 </a:t>
-            </a:r>
-            <a:r>
-              <a:rPr kumimoji="1" lang="ja-JP" altLang="en-US"/>
-              <a:t>レベル</a:t>
+              <a:rPr lang="en-US" smtClean="0"/>
+              <a:t>Fourth level</a:t>
             </a:r>
           </a:p>
           <a:p>
             <a:pPr lvl="4"/>
             <a:r>
-              <a:rPr kumimoji="1" lang="ja-JP" altLang="en-US"/>
-              <a:t>第 </a:t>
-            </a:r>
-            <a:r>
-              <a:rPr kumimoji="1" lang="en-US" altLang="ja-JP"/>
-              <a:t>5 </a:t>
-            </a:r>
-            <a:r>
-              <a:rPr kumimoji="1" lang="ja-JP" altLang="en-US"/>
-              <a:t>レベル</a:t>
-            </a:r>
-          </a:p>
-        </p:txBody>
-      </p:sp>
-      <p:sp>
-        <p:nvSpPr>
-          <p:cNvPr id="4" name="日付プレースホルダー 3">
-            <a:extLst>
-              <a:ext uri="{FF2B5EF4-FFF2-40B4-BE49-F238E27FC236}">
-                <a16:creationId xmlns:a16="http://schemas.microsoft.com/office/drawing/2014/main" id="{8C34A028-73C1-76CC-20BB-74B66BC09759}"/>
-              </a:ext>
-            </a:extLst>
-          </p:cNvPr>
+              <a:rPr lang="en-US" smtClean="0"/>
+              <a:t>Fifth level</a:t>
+            </a:r>
+            <a:endParaRPr lang="en-US"/>
+          </a:p>
+        </p:txBody>
+      </p:sp>
+      <p:sp>
+        <p:nvSpPr>
+          <p:cNvPr id="4" name="Date Placeholder 3"/>
           <p:cNvSpPr>
             <a:spLocks noGrp="1"/>
           </p:cNvSpPr>
@@ -3169,8 +2697,8 @@
         </p:nvSpPr>
         <p:spPr>
           <a:xfrm>
-            <a:off x="838200" y="6356350"/>
-            <a:ext cx="2743200" cy="365125"/>
+            <a:off x="457200" y="6356350"/>
+            <a:ext cx="2133600" cy="365125"/>
           </a:xfrm>
           <a:prstGeom prst="rect">
             <a:avLst/>
@@ -3183,30 +2711,24 @@
               <a:defRPr sz="1200">
                 <a:solidFill>
                   <a:schemeClr val="tx1">
-                    <a:tint val="82000"/>
+                    <a:tint val="75000"/>
                   </a:schemeClr>
                 </a:solidFill>
               </a:defRPr>
             </a:lvl1pPr>
           </a:lstStyle>
           <a:p>
-            <a:fld id="{BD92BF0F-4C4E-4C20-B7A0-DBBE649AEBF0}" type="datetimeFigureOut">
-              <a:rPr kumimoji="1" lang="ja-JP" altLang="en-US" smtClean="0"/>
-              <a:t>2026/3/26</a:t>
+            <a:fld id="{5BCAD085-E8A6-8845-BD4E-CB4CCA059FC4}" type="datetimeFigureOut">
+              <a:rPr lang="en-US" smtClean="0"/>
+              <a:t>1/27/13</a:t>
             </a:fld>
-            <a:endParaRPr kumimoji="1" lang="ja-JP" altLang="en-US"/>
-          </a:p>
-        </p:txBody>
-      </p:sp>
-      <p:sp>
-        <p:nvSpPr>
-          <p:cNvPr id="5" name="フッター プレースホルダー 4">
-            <a:extLst>
-              <a:ext uri="{FF2B5EF4-FFF2-40B4-BE49-F238E27FC236}">
-                <a16:creationId xmlns:a16="http://schemas.microsoft.com/office/drawing/2014/main" id="{EB346127-E541-5455-7048-C1FD1756D080}"/>
-              </a:ext>
-            </a:extLst>
-          </p:cNvPr>
+            <a:endParaRPr lang="en-US"/>
+          </a:p>
+        </p:txBody>
+      </p:sp>
+      <p:sp>
+        <p:nvSpPr>
+          <p:cNvPr id="5" name="Footer Placeholder 4"/>
           <p:cNvSpPr>
             <a:spLocks noGrp="1"/>
           </p:cNvSpPr>
@@ -3216,8 +2738,8 @@
         </p:nvSpPr>
         <p:spPr>
           <a:xfrm>
-            <a:off x="4038600" y="6356350"/>
-            <a:ext cx="4114800" cy="365125"/>
+            <a:off x="3124200" y="6356350"/>
+            <a:ext cx="2895600" cy="365125"/>
           </a:xfrm>
           <a:prstGeom prst="rect">
             <a:avLst/>
@@ -3230,26 +2752,20 @@
               <a:defRPr sz="1200">
                 <a:solidFill>
                   <a:schemeClr val="tx1">
-                    <a:tint val="82000"/>
+                    <a:tint val="75000"/>
                   </a:schemeClr>
                 </a:solidFill>
               </a:defRPr>
             </a:lvl1pPr>
           </a:lstStyle>
           <a:p>
-            <a:endParaRPr kumimoji="1" lang="ja-JP" altLang="en-US"/>
-          </a:p>
-        </p:txBody>
-      </p:sp>
-      <p:sp>
-        <p:nvSpPr>
-          <p:cNvPr id="6" name="スライド番号プレースホルダー 5">
-            <a:extLst>
-              <a:ext uri="{FF2B5EF4-FFF2-40B4-BE49-F238E27FC236}">
-                <a16:creationId xmlns:a16="http://schemas.microsoft.com/office/drawing/2014/main" id="{8B89979A-1F4F-6B34-7F3D-82487A49B4B0}"/>
-              </a:ext>
-            </a:extLst>
-          </p:cNvPr>
+            <a:endParaRPr lang="en-US"/>
+          </a:p>
+        </p:txBody>
+      </p:sp>
+      <p:sp>
+        <p:nvSpPr>
+          <p:cNvPr id="6" name="Slide Number Placeholder 5"/>
           <p:cNvSpPr>
             <a:spLocks noGrp="1"/>
           </p:cNvSpPr>
@@ -3259,8 +2775,8 @@
         </p:nvSpPr>
         <p:spPr>
           <a:xfrm>
-            <a:off x="8610600" y="6356350"/>
-            <a:ext cx="2743200" cy="365125"/>
+            <a:off x="6553200" y="6356350"/>
+            <a:ext cx="2133600" cy="365125"/>
           </a:xfrm>
           <a:prstGeom prst="rect">
             <a:avLst/>
@@ -3273,25 +2789,25 @@
               <a:defRPr sz="1200">
                 <a:solidFill>
                   <a:schemeClr val="tx1">
-                    <a:tint val="82000"/>
+                    <a:tint val="75000"/>
                   </a:schemeClr>
                 </a:solidFill>
               </a:defRPr>
             </a:lvl1pPr>
           </a:lstStyle>
           <a:p>
-            <a:fld id="{261FE82B-A1D7-4DB1-A425-67003437CDD9}" type="slidenum">
-              <a:rPr kumimoji="1" lang="ja-JP" altLang="en-US" smtClean="0"/>
+            <a:fld id="{C1FF6DA9-008F-8B48-92A6-B652298478BF}" type="slidenum">
+              <a:rPr lang="en-US" smtClean="0"/>
               <a:t>‹#›</a:t>
             </a:fld>
-            <a:endParaRPr kumimoji="1" lang="ja-JP" altLang="en-US"/>
+            <a:endParaRPr lang="en-US"/>
           </a:p>
         </p:txBody>
       </p:sp>
     </p:spTree>
     <p:extLst>
       <p:ext uri="{BB962C8B-B14F-4D97-AF65-F5344CB8AC3E}">
-        <p14:creationId xmlns:p14="http://schemas.microsoft.com/office/powerpoint/2010/main" val="2936396297"/>
+        <p14:creationId xmlns:p14="http://schemas.microsoft.com/office/powerpoint/2010/main" val="2209977519"/>
       </p:ext>
     </p:extLst>
   </p:cSld>
@@ -3311,15 +2827,12 @@
   </p:sldLayoutIdLst>
   <p:txStyles>
     <p:titleStyle>
-      <a:lvl1pPr algn="l" defTabSz="914400" rtl="0" eaLnBrk="1" latinLnBrk="0" hangingPunct="1">
-        <a:lnSpc>
-          <a:spcPct val="90000"/>
-        </a:lnSpc>
+      <a:lvl1pPr algn="ctr" defTabSz="457200" rtl="0" eaLnBrk="1" latinLnBrk="0" hangingPunct="1">
         <a:spcBef>
           <a:spcPct val="0"/>
         </a:spcBef>
         <a:buNone/>
-        <a:defRPr kumimoji="1" sz="4400" kern="1200">
+        <a:defRPr sz="4400" kern="1200">
           <a:solidFill>
             <a:schemeClr val="tx1"/>
           </a:solidFill>
@@ -3330,16 +2843,13 @@
       </a:lvl1pPr>
     </p:titleStyle>
     <p:bodyStyle>
-      <a:lvl1pPr marL="228600" indent="-228600" algn="l" defTabSz="914400" rtl="0" eaLnBrk="1" latinLnBrk="0" hangingPunct="1">
-        <a:lnSpc>
-          <a:spcPct val="90000"/>
-        </a:lnSpc>
+      <a:lvl1pPr marL="342900" indent="-342900" algn="l" defTabSz="457200" rtl="0" eaLnBrk="1" latinLnBrk="0" hangingPunct="1">
         <a:spcBef>
-          <a:spcPts val="1000"/>
+          <a:spcPct val="20000"/>
         </a:spcBef>
-        <a:buFont typeface="Arial" panose="020B0604020202020204" pitchFamily="34" charset="0"/>
+        <a:buFont typeface="Arial"/>
         <a:buChar char="•"/>
-        <a:defRPr kumimoji="1" sz="2800" kern="1200">
+        <a:defRPr sz="3200" kern="1200">
           <a:solidFill>
             <a:schemeClr val="tx1"/>
           </a:solidFill>
@@ -3348,16 +2858,13 @@
           <a:cs typeface="+mn-cs"/>
         </a:defRPr>
       </a:lvl1pPr>
-      <a:lvl2pPr marL="685800" indent="-228600" algn="l" defTabSz="914400" rtl="0" eaLnBrk="1" latinLnBrk="0" hangingPunct="1">
-        <a:lnSpc>
-          <a:spcPct val="90000"/>
-        </a:lnSpc>
+      <a:lvl2pPr marL="742950" indent="-285750" algn="l" defTabSz="457200" rtl="0" eaLnBrk="1" latinLnBrk="0" hangingPunct="1">
         <a:spcBef>
-          <a:spcPts val="500"/>
+          <a:spcPct val="20000"/>
         </a:spcBef>
-        <a:buFont typeface="Arial" panose="020B0604020202020204" pitchFamily="34" charset="0"/>
-        <a:buChar char="•"/>
-        <a:defRPr kumimoji="1" sz="2400" kern="1200">
+        <a:buFont typeface="Arial"/>
+        <a:buChar char="–"/>
+        <a:defRPr sz="2800" kern="1200">
           <a:solidFill>
             <a:schemeClr val="tx1"/>
           </a:solidFill>
@@ -3366,16 +2873,13 @@
           <a:cs typeface="+mn-cs"/>
         </a:defRPr>
       </a:lvl2pPr>
-      <a:lvl3pPr marL="1143000" indent="-228600" algn="l" defTabSz="914400" rtl="0" eaLnBrk="1" latinLnBrk="0" hangingPunct="1">
-        <a:lnSpc>
-          <a:spcPct val="90000"/>
-        </a:lnSpc>
+      <a:lvl3pPr marL="1143000" indent="-228600" algn="l" defTabSz="457200" rtl="0" eaLnBrk="1" latinLnBrk="0" hangingPunct="1">
         <a:spcBef>
-          <a:spcPts val="500"/>
+          <a:spcPct val="20000"/>
         </a:spcBef>
-        <a:buFont typeface="Arial" panose="020B0604020202020204" pitchFamily="34" charset="0"/>
+        <a:buFont typeface="Arial"/>
         <a:buChar char="•"/>
-        <a:defRPr kumimoji="1" sz="2000" kern="1200">
+        <a:defRPr sz="2400" kern="1200">
           <a:solidFill>
             <a:schemeClr val="tx1"/>
           </a:solidFill>
@@ -3384,16 +2888,13 @@
           <a:cs typeface="+mn-cs"/>
         </a:defRPr>
       </a:lvl3pPr>
-      <a:lvl4pPr marL="1600200" indent="-228600" algn="l" defTabSz="914400" rtl="0" eaLnBrk="1" latinLnBrk="0" hangingPunct="1">
-        <a:lnSpc>
-          <a:spcPct val="90000"/>
-        </a:lnSpc>
+      <a:lvl4pPr marL="1600200" indent="-228600" algn="l" defTabSz="457200" rtl="0" eaLnBrk="1" latinLnBrk="0" hangingPunct="1">
         <a:spcBef>
-          <a:spcPts val="500"/>
+          <a:spcPct val="20000"/>
         </a:spcBef>
-        <a:buFont typeface="Arial" panose="020B0604020202020204" pitchFamily="34" charset="0"/>
-        <a:buChar char="•"/>
-        <a:defRPr kumimoji="1" sz="1800" kern="1200">
+        <a:buFont typeface="Arial"/>
+        <a:buChar char="–"/>
+        <a:defRPr sz="2000" kern="1200">
           <a:solidFill>
             <a:schemeClr val="tx1"/>
           </a:solidFill>
@@ -3402,16 +2903,13 @@
           <a:cs typeface="+mn-cs"/>
         </a:defRPr>
       </a:lvl4pPr>
-      <a:lvl5pPr marL="2057400" indent="-228600" algn="l" defTabSz="914400" rtl="0" eaLnBrk="1" latinLnBrk="0" hangingPunct="1">
-        <a:lnSpc>
-          <a:spcPct val="90000"/>
-        </a:lnSpc>
+      <a:lvl5pPr marL="2057400" indent="-228600" algn="l" defTabSz="457200" rtl="0" eaLnBrk="1" latinLnBrk="0" hangingPunct="1">
         <a:spcBef>
-          <a:spcPts val="500"/>
+          <a:spcPct val="20000"/>
         </a:spcBef>
-        <a:buFont typeface="Arial" panose="020B0604020202020204" pitchFamily="34" charset="0"/>
-        <a:buChar char="•"/>
-        <a:defRPr kumimoji="1" sz="1800" kern="1200">
+        <a:buFont typeface="Arial"/>
+        <a:buChar char="»"/>
+        <a:defRPr sz="2000" kern="1200">
           <a:solidFill>
             <a:schemeClr val="tx1"/>
           </a:solidFill>
@@ -3420,16 +2918,13 @@
           <a:cs typeface="+mn-cs"/>
         </a:defRPr>
       </a:lvl5pPr>
-      <a:lvl6pPr marL="2514600" indent="-228600" algn="l" defTabSz="914400" rtl="0" eaLnBrk="1" latinLnBrk="0" hangingPunct="1">
-        <a:lnSpc>
-          <a:spcPct val="90000"/>
-        </a:lnSpc>
+      <a:lvl6pPr marL="2514600" indent="-228600" algn="l" defTabSz="457200" rtl="0" eaLnBrk="1" latinLnBrk="0" hangingPunct="1">
         <a:spcBef>
-          <a:spcPts val="500"/>
+          <a:spcPct val="20000"/>
         </a:spcBef>
-        <a:buFont typeface="Arial" panose="020B0604020202020204" pitchFamily="34" charset="0"/>
+        <a:buFont typeface="Arial"/>
         <a:buChar char="•"/>
-        <a:defRPr kumimoji="1" sz="1800" kern="1200">
+        <a:defRPr sz="2000" kern="1200">
           <a:solidFill>
             <a:schemeClr val="tx1"/>
           </a:solidFill>
@@ -3438,16 +2933,13 @@
           <a:cs typeface="+mn-cs"/>
         </a:defRPr>
       </a:lvl6pPr>
-      <a:lvl7pPr marL="2971800" indent="-228600" algn="l" defTabSz="914400" rtl="0" eaLnBrk="1" latinLnBrk="0" hangingPunct="1">
-        <a:lnSpc>
-          <a:spcPct val="90000"/>
-        </a:lnSpc>
+      <a:lvl7pPr marL="2971800" indent="-228600" algn="l" defTabSz="457200" rtl="0" eaLnBrk="1" latinLnBrk="0" hangingPunct="1">
         <a:spcBef>
-          <a:spcPts val="500"/>
+          <a:spcPct val="20000"/>
         </a:spcBef>
-        <a:buFont typeface="Arial" panose="020B0604020202020204" pitchFamily="34" charset="0"/>
+        <a:buFont typeface="Arial"/>
         <a:buChar char="•"/>
-        <a:defRPr kumimoji="1" sz="1800" kern="1200">
+        <a:defRPr sz="2000" kern="1200">
           <a:solidFill>
             <a:schemeClr val="tx1"/>
           </a:solidFill>
@@ -3456,16 +2948,13 @@
           <a:cs typeface="+mn-cs"/>
         </a:defRPr>
       </a:lvl7pPr>
-      <a:lvl8pPr marL="3429000" indent="-228600" algn="l" defTabSz="914400" rtl="0" eaLnBrk="1" latinLnBrk="0" hangingPunct="1">
-        <a:lnSpc>
-          <a:spcPct val="90000"/>
-        </a:lnSpc>
+      <a:lvl8pPr marL="3429000" indent="-228600" algn="l" defTabSz="457200" rtl="0" eaLnBrk="1" latinLnBrk="0" hangingPunct="1">
         <a:spcBef>
-          <a:spcPts val="500"/>
+          <a:spcPct val="20000"/>
         </a:spcBef>
-        <a:buFont typeface="Arial" panose="020B0604020202020204" pitchFamily="34" charset="0"/>
+        <a:buFont typeface="Arial"/>
         <a:buChar char="•"/>
-        <a:defRPr kumimoji="1" sz="1800" kern="1200">
+        <a:defRPr sz="2000" kern="1200">
           <a:solidFill>
             <a:schemeClr val="tx1"/>
           </a:solidFill>
@@ -3474,16 +2963,13 @@
           <a:cs typeface="+mn-cs"/>
         </a:defRPr>
       </a:lvl8pPr>
-      <a:lvl9pPr marL="3886200" indent="-228600" algn="l" defTabSz="914400" rtl="0" eaLnBrk="1" latinLnBrk="0" hangingPunct="1">
-        <a:lnSpc>
-          <a:spcPct val="90000"/>
-        </a:lnSpc>
+      <a:lvl9pPr marL="3886200" indent="-228600" algn="l" defTabSz="457200" rtl="0" eaLnBrk="1" latinLnBrk="0" hangingPunct="1">
         <a:spcBef>
-          <a:spcPts val="500"/>
+          <a:spcPct val="20000"/>
         </a:spcBef>
-        <a:buFont typeface="Arial" panose="020B0604020202020204" pitchFamily="34" charset="0"/>
+        <a:buFont typeface="Arial"/>
         <a:buChar char="•"/>
-        <a:defRPr kumimoji="1" sz="1800" kern="1200">
+        <a:defRPr sz="2000" kern="1200">
           <a:solidFill>
             <a:schemeClr val="tx1"/>
           </a:solidFill>
@@ -3495,10 +2981,10 @@
     </p:bodyStyle>
     <p:otherStyle>
       <a:defPPr>
-        <a:defRPr lang="ja-JP"/>
+        <a:defRPr lang="en-US"/>
       </a:defPPr>
-      <a:lvl1pPr marL="0" algn="l" defTabSz="914400" rtl="0" eaLnBrk="1" latinLnBrk="0" hangingPunct="1">
-        <a:defRPr kumimoji="1" sz="1800" kern="1200">
+      <a:lvl1pPr marL="0" algn="l" defTabSz="457200" rtl="0" eaLnBrk="1" latinLnBrk="0" hangingPunct="1">
+        <a:defRPr sz="1800" kern="1200">
           <a:solidFill>
             <a:schemeClr val="tx1"/>
           </a:solidFill>
@@ -3507,8 +2993,8 @@
           <a:cs typeface="+mn-cs"/>
         </a:defRPr>
       </a:lvl1pPr>
-      <a:lvl2pPr marL="457200" algn="l" defTabSz="914400" rtl="0" eaLnBrk="1" latinLnBrk="0" hangingPunct="1">
-        <a:defRPr kumimoji="1" sz="1800" kern="1200">
+      <a:lvl2pPr marL="457200" algn="l" defTabSz="457200" rtl="0" eaLnBrk="1" latinLnBrk="0" hangingPunct="1">
+        <a:defRPr sz="1800" kern="1200">
           <a:solidFill>
             <a:schemeClr val="tx1"/>
           </a:solidFill>
@@ -3517,8 +3003,8 @@
           <a:cs typeface="+mn-cs"/>
         </a:defRPr>
       </a:lvl2pPr>
-      <a:lvl3pPr marL="914400" algn="l" defTabSz="914400" rtl="0" eaLnBrk="1" latinLnBrk="0" hangingPunct="1">
-        <a:defRPr kumimoji="1" sz="1800" kern="1200">
+      <a:lvl3pPr marL="914400" algn="l" defTabSz="457200" rtl="0" eaLnBrk="1" latinLnBrk="0" hangingPunct="1">
+        <a:defRPr sz="1800" kern="1200">
           <a:solidFill>
             <a:schemeClr val="tx1"/>
           </a:solidFill>
@@ -3527,8 +3013,8 @@
           <a:cs typeface="+mn-cs"/>
         </a:defRPr>
       </a:lvl3pPr>
-      <a:lvl4pPr marL="1371600" algn="l" defTabSz="914400" rtl="0" eaLnBrk="1" latinLnBrk="0" hangingPunct="1">
-        <a:defRPr kumimoji="1" sz="1800" kern="1200">
+      <a:lvl4pPr marL="1371600" algn="l" defTabSz="457200" rtl="0" eaLnBrk="1" latinLnBrk="0" hangingPunct="1">
+        <a:defRPr sz="1800" kern="1200">
           <a:solidFill>
             <a:schemeClr val="tx1"/>
           </a:solidFill>
@@ -3537,8 +3023,8 @@
           <a:cs typeface="+mn-cs"/>
         </a:defRPr>
       </a:lvl4pPr>
-      <a:lvl5pPr marL="1828800" algn="l" defTabSz="914400" rtl="0" eaLnBrk="1" latinLnBrk="0" hangingPunct="1">
-        <a:defRPr kumimoji="1" sz="1800" kern="1200">
+      <a:lvl5pPr marL="1828800" algn="l" defTabSz="457200" rtl="0" eaLnBrk="1" latinLnBrk="0" hangingPunct="1">
+        <a:defRPr sz="1800" kern="1200">
           <a:solidFill>
             <a:schemeClr val="tx1"/>
           </a:solidFill>
@@ -3547,8 +3033,8 @@
           <a:cs typeface="+mn-cs"/>
         </a:defRPr>
       </a:lvl5pPr>
-      <a:lvl6pPr marL="2286000" algn="l" defTabSz="914400" rtl="0" eaLnBrk="1" latinLnBrk="0" hangingPunct="1">
-        <a:defRPr kumimoji="1" sz="1800" kern="1200">
+      <a:lvl6pPr marL="2286000" algn="l" defTabSz="457200" rtl="0" eaLnBrk="1" latinLnBrk="0" hangingPunct="1">
+        <a:defRPr sz="1800" kern="1200">
           <a:solidFill>
             <a:schemeClr val="tx1"/>
           </a:solidFill>
@@ -3557,8 +3043,8 @@
           <a:cs typeface="+mn-cs"/>
         </a:defRPr>
       </a:lvl6pPr>
-      <a:lvl7pPr marL="2743200" algn="l" defTabSz="914400" rtl="0" eaLnBrk="1" latinLnBrk="0" hangingPunct="1">
-        <a:defRPr kumimoji="1" sz="1800" kern="1200">
+      <a:lvl7pPr marL="2743200" algn="l" defTabSz="457200" rtl="0" eaLnBrk="1" latinLnBrk="0" hangingPunct="1">
+        <a:defRPr sz="1800" kern="1200">
           <a:solidFill>
             <a:schemeClr val="tx1"/>
           </a:solidFill>
@@ -3567,8 +3053,8 @@
           <a:cs typeface="+mn-cs"/>
         </a:defRPr>
       </a:lvl7pPr>
-      <a:lvl8pPr marL="3200400" algn="l" defTabSz="914400" rtl="0" eaLnBrk="1" latinLnBrk="0" hangingPunct="1">
-        <a:defRPr kumimoji="1" sz="1800" kern="1200">
+      <a:lvl8pPr marL="3200400" algn="l" defTabSz="457200" rtl="0" eaLnBrk="1" latinLnBrk="0" hangingPunct="1">
+        <a:defRPr sz="1800" kern="1200">
           <a:solidFill>
             <a:schemeClr val="tx1"/>
           </a:solidFill>
@@ -3577,8 +3063,8 @@
           <a:cs typeface="+mn-cs"/>
         </a:defRPr>
       </a:lvl8pPr>
-      <a:lvl9pPr marL="3657600" algn="l" defTabSz="914400" rtl="0" eaLnBrk="1" latinLnBrk="0" hangingPunct="1">
-        <a:defRPr kumimoji="1" sz="1800" kern="1200">
+      <a:lvl9pPr marL="3657600" algn="l" defTabSz="457200" rtl="0" eaLnBrk="1" latinLnBrk="0" hangingPunct="1">
+        <a:defRPr sz="1800" kern="1200">
           <a:solidFill>
             <a:schemeClr val="tx1"/>
           </a:solidFill>
@@ -3593,7 +3079,7 @@
 </file>
 
 <file path=ppt/slides/slide1.xml><?xml version="1.0" encoding="utf-8"?>
-<p:sld xmlns:a="http://schemas.openxmlformats.org/drawingml/2006/main" xmlns:r="http://schemas.openxmlformats.org/officeDocument/2006/relationships" xmlns:p="http://schemas.openxmlformats.org/presentationml/2006/main">
+<p:sld xmlns:a="http://schemas.openxmlformats.org/drawingml/2006/main" xmlns:p="http://schemas.openxmlformats.org/presentationml/2006/main" xmlns:r="http://schemas.openxmlformats.org/officeDocument/2006/relationships">
   <p:cSld>
     <p:spTree>
       <p:nvGrpSpPr>
@@ -3601,30 +3087,60 @@
         <p:cNvGrpSpPr/>
         <p:nvPr/>
       </p:nvGrpSpPr>
-      <p:grpSpPr>
-        <a:xfrm>
-          <a:off x="0" y="0"/>
-          <a:ext cx="0" cy="0"/>
-          <a:chOff x="0" y="0"/>
-          <a:chExt cx="0" cy="0"/>
-        </a:xfrm>
-      </p:grpSpPr>
-      <p:sp>
-        <p:nvSpPr>
-          <p:cNvPr id="5" name="テキスト ボックス 4">
-            <a:extLst>
-              <a:ext uri="{FF2B5EF4-FFF2-40B4-BE49-F238E27FC236}">
-                <a16:creationId xmlns:a16="http://schemas.microsoft.com/office/drawing/2014/main" id="{06353CD4-FE0D-E6C6-76A3-DD92D36A79C9}"/>
-              </a:ext>
-            </a:extLst>
-          </p:cNvPr>
+      <p:grpSpPr/>
+      <p:sp>
+        <p:nvSpPr>
+          <p:cNvPr id="2" name="Rectangle 1"/>
+          <p:cNvSpPr/>
+          <p:nvPr/>
+        </p:nvSpPr>
+        <p:spPr>
+          <a:xfrm>
+            <a:off x="0" y="0"/>
+            <a:ext cx="12191695" cy="365760"/>
+          </a:xfrm>
+          <a:prstGeom prst="rect">
+            <a:avLst/>
+          </a:prstGeom>
+          <a:solidFill>
+            <a:srgbClr val="0078D4"/>
+          </a:solidFill>
+          <a:ln>
+            <a:noFill/>
+          </a:ln>
+        </p:spPr>
+        <p:style>
+          <a:lnRef idx="1">
+            <a:schemeClr val="accent1"/>
+          </a:lnRef>
+          <a:fillRef idx="3">
+            <a:schemeClr val="accent1"/>
+          </a:fillRef>
+          <a:effectRef idx="2">
+            <a:schemeClr val="accent1"/>
+          </a:effectRef>
+          <a:fontRef idx="minor">
+            <a:schemeClr val="lt1"/>
+          </a:fontRef>
+        </p:style>
+        <p:txBody>
+          <a:bodyPr rtlCol="0" anchor="ctr"/>
+          <a:lstStyle/>
+          <a:p>
+            <a:pPr algn="ctr"/>
+          </a:p>
+        </p:txBody>
+      </p:sp>
+      <p:sp>
+        <p:nvSpPr>
+          <p:cNvPr id="3" name="TextBox 2"/>
           <p:cNvSpPr txBox="1"/>
           <p:nvPr/>
         </p:nvSpPr>
         <p:spPr>
           <a:xfrm>
-            <a:off x="5105400" y="3244334"/>
-            <a:ext cx="1800493" cy="369332"/>
+            <a:off x="685800" y="777240"/>
+            <a:ext cx="4572000" cy="731520"/>
           </a:xfrm>
           <a:prstGeom prst="rect">
             <a:avLst/>
@@ -3632,24 +3148,119 @@
           <a:noFill/>
         </p:spPr>
         <p:txBody>
-          <a:bodyPr wrap="none" rtlCol="0">
+          <a:bodyPr wrap="none">
             <a:spAutoFit/>
           </a:bodyPr>
           <a:lstStyle/>
           <a:p>
-            <a:r>
-              <a:rPr kumimoji="1" lang="ja-JP" altLang="en-US" dirty="0"/>
-              <a:t>免責事項シート</a:t>
+            <a:pPr algn="l"/>
+            <a:r>
+              <a:rPr sz="2400" b="1">
+                <a:solidFill>
+                  <a:srgbClr val="202020"/>
+                </a:solidFill>
+                <a:latin typeface="Meiryo UI"/>
+              </a:rPr>
+              <a:t>参考リンク</a:t>
+            </a:r>
+          </a:p>
+        </p:txBody>
+      </p:sp>
+      <p:sp>
+        <p:nvSpPr>
+          <p:cNvPr id="4" name="TextBox 3"/>
+          <p:cNvSpPr txBox="1"/>
+          <p:nvPr/>
+        </p:nvSpPr>
+        <p:spPr>
+          <a:xfrm>
+            <a:off x="868680" y="1645920"/>
+            <a:ext cx="10424160" cy="4389120"/>
+          </a:xfrm>
+          <a:prstGeom prst="rect">
+            <a:avLst/>
+          </a:prstGeom>
+          <a:noFill/>
+        </p:spPr>
+        <p:txBody>
+          <a:bodyPr wrap="none">
+            <a:spAutoFit/>
+          </a:bodyPr>
+          <a:lstStyle/>
+          <a:p>
+            <a:pPr algn="l"/>
+            <a:r>
+              <a:rPr sz="1600" b="0">
+                <a:solidFill>
+                  <a:srgbClr val="202020"/>
+                </a:solidFill>
+                <a:latin typeface="Meiryo UI"/>
+              </a:rPr>
+              <a:t>- 参照した URL と参照目的を列挙してください。</a:t>
+            </a:r>
+          </a:p>
+          <a:p>
+            <a:pPr algn="l"/>
+            <a:r>
+              <a:rPr sz="1600" b="0">
+                <a:solidFill>
+                  <a:srgbClr val="202020"/>
+                </a:solidFill>
+                <a:latin typeface="Meiryo UI"/>
+              </a:rPr>
+              <a:t>- 必要に応じて短い注釈を追記してください。</a:t>
+            </a:r>
+          </a:p>
+          <a:p>
+            <a:pPr algn="l"/>
+            <a:r>
+              <a:rPr sz="1600" b="0">
+                <a:solidFill>
+                  <a:srgbClr val="202020"/>
+                </a:solidFill>
+                <a:latin typeface="Meiryo UI"/>
+              </a:rPr>
+              <a:t>- このスライドは資料の最終ページとして利用します。</a:t>
+            </a:r>
+          </a:p>
+        </p:txBody>
+      </p:sp>
+      <p:sp>
+        <p:nvSpPr>
+          <p:cNvPr id="5" name="TextBox 4"/>
+          <p:cNvSpPr txBox="1"/>
+          <p:nvPr/>
+        </p:nvSpPr>
+        <p:spPr>
+          <a:xfrm>
+            <a:off x="8321040" y="5989320"/>
+            <a:ext cx="3200400" cy="274320"/>
+          </a:xfrm>
+          <a:prstGeom prst="rect">
+            <a:avLst/>
+          </a:prstGeom>
+          <a:noFill/>
+        </p:spPr>
+        <p:txBody>
+          <a:bodyPr wrap="none">
+            <a:spAutoFit/>
+          </a:bodyPr>
+          <a:lstStyle/>
+          <a:p>
+            <a:pPr algn="r"/>
+            <a:r>
+              <a:rPr sz="1000" b="0">
+                <a:solidFill>
+                  <a:srgbClr val="666666"/>
+                </a:solidFill>
+                <a:latin typeface="Meiryo UI"/>
+              </a:rPr>
+              <a:t>GitHub Copilot CLI template</a:t>
             </a:r>
           </a:p>
         </p:txBody>
       </p:sp>
     </p:spTree>
-    <p:extLst>
-      <p:ext uri="{BB962C8B-B14F-4D97-AF65-F5344CB8AC3E}">
-        <p14:creationId xmlns:p14="http://schemas.microsoft.com/office/powerpoint/2010/main" val="1498365131"/>
-      </p:ext>
-    </p:extLst>
   </p:cSld>
   <p:clrMapOvr>
     <a:masterClrMapping/>
@@ -3658,7 +3269,7 @@
 </file>
 
 <file path=ppt/theme/theme1.xml><?xml version="1.0" encoding="utf-8"?>
-<a:theme xmlns:a="http://schemas.openxmlformats.org/drawingml/2006/main" name="Office テーマ">
+<a:theme xmlns:a="http://schemas.openxmlformats.org/drawingml/2006/main" name="Office Theme">
   <a:themeElements>
     <a:clrScheme name="Office">
       <a:dk1>
@@ -3668,44 +3279,44 @@
         <a:sysClr val="window" lastClr="FFFFFF"/>
       </a:lt1>
       <a:dk2>
-        <a:srgbClr val="0E2841"/>
+        <a:srgbClr val="1F497D"/>
       </a:dk2>
       <a:lt2>
-        <a:srgbClr val="E8E8E8"/>
+        <a:srgbClr val="EEECE1"/>
       </a:lt2>
       <a:accent1>
-        <a:srgbClr val="156082"/>
+        <a:srgbClr val="4F81BD"/>
       </a:accent1>
       <a:accent2>
-        <a:srgbClr val="E97132"/>
+        <a:srgbClr val="C0504D"/>
       </a:accent2>
       <a:accent3>
-        <a:srgbClr val="196B24"/>
+        <a:srgbClr val="9BBB59"/>
       </a:accent3>
       <a:accent4>
-        <a:srgbClr val="0F9ED5"/>
+        <a:srgbClr val="8064A2"/>
       </a:accent4>
       <a:accent5>
-        <a:srgbClr val="A02B93"/>
+        <a:srgbClr val="4BACC6"/>
       </a:accent5>
       <a:accent6>
-        <a:srgbClr val="4EA72E"/>
+        <a:srgbClr val="F79646"/>
       </a:accent6>
       <a:hlink>
-        <a:srgbClr val="467886"/>
+        <a:srgbClr val="0000FF"/>
       </a:hlink>
       <a:folHlink>
-        <a:srgbClr val="96607D"/>
+        <a:srgbClr val="800080"/>
       </a:folHlink>
     </a:clrScheme>
     <a:fontScheme name="Office">
       <a:majorFont>
-        <a:latin typeface="游ゴシック Light" panose="02110004020202020204"/>
+        <a:latin typeface="Calibri"/>
         <a:ea typeface=""/>
         <a:cs typeface=""/>
-        <a:font script="Jpan" typeface="游ゴシック Light"/>
+        <a:font script="Jpan" typeface="ＭＳ Ｐゴシック"/>
         <a:font script="Hang" typeface="맑은 고딕"/>
-        <a:font script="Hans" typeface="等线 Light"/>
+        <a:font script="Hans" typeface="宋体"/>
         <a:font script="Hant" typeface="新細明體"/>
         <a:font script="Arab" typeface="Times New Roman"/>
         <a:font script="Hebr" typeface="Times New Roman"/>
@@ -3733,31 +3344,14 @@
         <a:font script="Viet" typeface="Times New Roman"/>
         <a:font script="Uigh" typeface="Microsoft Uighur"/>
         <a:font script="Geor" typeface="Sylfaen"/>
-        <a:font script="Armn" typeface="Arial"/>
-        <a:font script="Bugi" typeface="Leelawadee UI"/>
-        <a:font script="Bopo" typeface="Microsoft JhengHei"/>
-        <a:font script="Java" typeface="Javanese Text"/>
-        <a:font script="Lisu" typeface="Segoe UI"/>
-        <a:font script="Mymr" typeface="Myanmar Text"/>
-        <a:font script="Nkoo" typeface="Ebrima"/>
-        <a:font script="Olck" typeface="Nirmala UI"/>
-        <a:font script="Osma" typeface="Ebrima"/>
-        <a:font script="Phag" typeface="Phagspa"/>
-        <a:font script="Syrn" typeface="Estrangelo Edessa"/>
-        <a:font script="Syrj" typeface="Estrangelo Edessa"/>
-        <a:font script="Syre" typeface="Estrangelo Edessa"/>
-        <a:font script="Sora" typeface="Nirmala UI"/>
-        <a:font script="Tale" typeface="Microsoft Tai Le"/>
-        <a:font script="Talu" typeface="Microsoft New Tai Lue"/>
-        <a:font script="Tfng" typeface="Ebrima"/>
       </a:majorFont>
       <a:minorFont>
-        <a:latin typeface="游ゴシック" panose="02110004020202020204"/>
+        <a:latin typeface="Calibri"/>
         <a:ea typeface=""/>
         <a:cs typeface=""/>
-        <a:font script="Jpan" typeface="游ゴシック"/>
+        <a:font script="Jpan" typeface="ＭＳ Ｐゴシック"/>
         <a:font script="Hang" typeface="맑은 고딕"/>
-        <a:font script="Hans" typeface="等线"/>
+        <a:font script="Hans" typeface="宋体"/>
         <a:font script="Hant" typeface="新細明體"/>
         <a:font script="Arab" typeface="Arial"/>
         <a:font script="Hebr" typeface="Arial"/>
@@ -3785,23 +3379,6 @@
         <a:font script="Viet" typeface="Arial"/>
         <a:font script="Uigh" typeface="Microsoft Uighur"/>
         <a:font script="Geor" typeface="Sylfaen"/>
-        <a:font script="Armn" typeface="Arial"/>
-        <a:font script="Bugi" typeface="Leelawadee UI"/>
-        <a:font script="Bopo" typeface="Microsoft JhengHei"/>
-        <a:font script="Java" typeface="Javanese Text"/>
-        <a:font script="Lisu" typeface="Segoe UI"/>
-        <a:font script="Mymr" typeface="Myanmar Text"/>
-        <a:font script="Nkoo" typeface="Ebrima"/>
-        <a:font script="Olck" typeface="Nirmala UI"/>
-        <a:font script="Osma" typeface="Ebrima"/>
-        <a:font script="Phag" typeface="Phagspa"/>
-        <a:font script="Syrn" typeface="Estrangelo Edessa"/>
-        <a:font script="Syrj" typeface="Estrangelo Edessa"/>
-        <a:font script="Syre" typeface="Estrangelo Edessa"/>
-        <a:font script="Sora" typeface="Nirmala UI"/>
-        <a:font script="Tale" typeface="Microsoft Tai Le"/>
-        <a:font script="Talu" typeface="Microsoft New Tai Lue"/>
-        <a:font script="Tfng" typeface="Ebrima"/>
       </a:minorFont>
     </a:fontScheme>
     <a:fmtScheme name="Office">
@@ -3813,136 +3390,180 @@
           <a:gsLst>
             <a:gs pos="0">
               <a:schemeClr val="phClr">
-                <a:lumMod val="110000"/>
-                <a:satMod val="105000"/>
-                <a:tint val="67000"/>
+                <a:tint val="50000"/>
+                <a:satMod val="300000"/>
               </a:schemeClr>
             </a:gs>
-            <a:gs pos="50000">
+            <a:gs pos="35000">
               <a:schemeClr val="phClr">
-                <a:lumMod val="105000"/>
-                <a:satMod val="103000"/>
-                <a:tint val="73000"/>
+                <a:tint val="37000"/>
+                <a:satMod val="300000"/>
               </a:schemeClr>
             </a:gs>
             <a:gs pos="100000">
               <a:schemeClr val="phClr">
-                <a:lumMod val="105000"/>
-                <a:satMod val="109000"/>
-                <a:tint val="81000"/>
+                <a:tint val="15000"/>
+                <a:satMod val="350000"/>
               </a:schemeClr>
             </a:gs>
           </a:gsLst>
-          <a:lin ang="5400000" scaled="0"/>
+          <a:lin ang="16200000" scaled="1"/>
         </a:gradFill>
         <a:gradFill rotWithShape="1">
           <a:gsLst>
             <a:gs pos="0">
               <a:schemeClr val="phClr">
-                <a:satMod val="103000"/>
-                <a:lumMod val="102000"/>
-                <a:tint val="94000"/>
-              </a:schemeClr>
-            </a:gs>
-            <a:gs pos="50000">
-              <a:schemeClr val="phClr">
-                <a:satMod val="110000"/>
-                <a:lumMod val="100000"/>
+                <a:tint val="100000"/>
                 <a:shade val="100000"/>
+                <a:satMod val="130000"/>
               </a:schemeClr>
             </a:gs>
             <a:gs pos="100000">
               <a:schemeClr val="phClr">
-                <a:lumMod val="99000"/>
-                <a:satMod val="120000"/>
-                <a:shade val="78000"/>
+                <a:tint val="50000"/>
+                <a:shade val="100000"/>
+                <a:satMod val="350000"/>
               </a:schemeClr>
             </a:gs>
           </a:gsLst>
-          <a:lin ang="5400000" scaled="0"/>
+          <a:lin ang="16200000" scaled="0"/>
         </a:gradFill>
       </a:fillStyleLst>
       <a:lnStyleLst>
-        <a:ln w="12700" cap="flat" cmpd="sng" algn="ctr">
+        <a:ln w="9525" cap="flat" cmpd="sng" algn="ctr">
           <a:solidFill>
-            <a:schemeClr val="phClr"/>
+            <a:schemeClr val="phClr">
+              <a:shade val="95000"/>
+              <a:satMod val="105000"/>
+            </a:schemeClr>
           </a:solidFill>
           <a:prstDash val="solid"/>
-          <a:miter lim="800000"/>
-        </a:ln>
-        <a:ln w="19050" cap="flat" cmpd="sng" algn="ctr">
-          <a:solidFill>
-            <a:schemeClr val="phClr"/>
-          </a:solidFill>
-          <a:prstDash val="solid"/>
-          <a:miter lim="800000"/>
         </a:ln>
         <a:ln w="25400" cap="flat" cmpd="sng" algn="ctr">
           <a:solidFill>
             <a:schemeClr val="phClr"/>
           </a:solidFill>
           <a:prstDash val="solid"/>
-          <a:miter lim="800000"/>
+        </a:ln>
+        <a:ln w="38100" cap="flat" cmpd="sng" algn="ctr">
+          <a:solidFill>
+            <a:schemeClr val="phClr"/>
+          </a:solidFill>
+          <a:prstDash val="solid"/>
         </a:ln>
       </a:lnStyleLst>
       <a:effectStyleLst>
         <a:effectStyle>
-          <a:effectLst/>
-        </a:effectStyle>
-        <a:effectStyle>
-          <a:effectLst/>
+          <a:effectLst>
+            <a:outerShdw blurRad="40000" dist="20000" dir="5400000" rotWithShape="0">
+              <a:srgbClr val="000000">
+                <a:alpha val="38000"/>
+              </a:srgbClr>
+            </a:outerShdw>
+          </a:effectLst>
         </a:effectStyle>
         <a:effectStyle>
           <a:effectLst>
-            <a:outerShdw blurRad="57150" dist="19050" dir="5400000" algn="ctr" rotWithShape="0">
+            <a:outerShdw blurRad="40000" dist="23000" dir="5400000" rotWithShape="0">
               <a:srgbClr val="000000">
-                <a:alpha val="63000"/>
+                <a:alpha val="35000"/>
               </a:srgbClr>
             </a:outerShdw>
           </a:effectLst>
+        </a:effectStyle>
+        <a:effectStyle>
+          <a:effectLst>
+            <a:outerShdw blurRad="40000" dist="23000" dir="5400000" rotWithShape="0">
+              <a:srgbClr val="000000">
+                <a:alpha val="35000"/>
+              </a:srgbClr>
+            </a:outerShdw>
+          </a:effectLst>
+          <a:scene3d>
+            <a:camera prst="orthographicFront">
+              <a:rot lat="0" lon="0" rev="0"/>
+            </a:camera>
+            <a:lightRig rig="threePt" dir="t">
+              <a:rot lat="0" lon="0" rev="1200000"/>
+            </a:lightRig>
+          </a:scene3d>
+          <a:sp3d>
+            <a:bevelT w="63500" h="25400"/>
+          </a:sp3d>
         </a:effectStyle>
       </a:effectStyleLst>
       <a:bgFillStyleLst>
         <a:solidFill>
           <a:schemeClr val="phClr"/>
         </a:solidFill>
-        <a:solidFill>
-          <a:schemeClr val="phClr">
-            <a:tint val="95000"/>
-            <a:satMod val="170000"/>
-          </a:schemeClr>
-        </a:solidFill>
         <a:gradFill rotWithShape="1">
           <a:gsLst>
             <a:gs pos="0">
               <a:schemeClr val="phClr">
-                <a:tint val="93000"/>
-                <a:satMod val="150000"/>
-                <a:shade val="98000"/>
-                <a:lumMod val="102000"/>
+                <a:tint val="40000"/>
+                <a:satMod val="350000"/>
               </a:schemeClr>
             </a:gs>
-            <a:gs pos="50000">
+            <a:gs pos="40000">
               <a:schemeClr val="phClr">
-                <a:tint val="98000"/>
-                <a:satMod val="130000"/>
-                <a:shade val="90000"/>
-                <a:lumMod val="103000"/>
+                <a:tint val="45000"/>
+                <a:shade val="99000"/>
+                <a:satMod val="350000"/>
               </a:schemeClr>
             </a:gs>
             <a:gs pos="100000">
               <a:schemeClr val="phClr">
-                <a:shade val="63000"/>
-                <a:satMod val="120000"/>
+                <a:shade val="20000"/>
+                <a:satMod val="255000"/>
               </a:schemeClr>
             </a:gs>
           </a:gsLst>
-          <a:lin ang="5400000" scaled="0"/>
+          <a:path path="circle">
+            <a:fillToRect l="50000" t="-80000" r="50000" b="180000"/>
+          </a:path>
+        </a:gradFill>
+        <a:gradFill rotWithShape="1">
+          <a:gsLst>
+            <a:gs pos="0">
+              <a:schemeClr val="phClr">
+                <a:tint val="80000"/>
+                <a:satMod val="300000"/>
+              </a:schemeClr>
+            </a:gs>
+            <a:gs pos="100000">
+              <a:schemeClr val="phClr">
+                <a:shade val="30000"/>
+                <a:satMod val="200000"/>
+              </a:schemeClr>
+            </a:gs>
+          </a:gsLst>
+          <a:path path="circle">
+            <a:fillToRect l="50000" t="50000" r="50000" b="50000"/>
+          </a:path>
         </a:gradFill>
       </a:bgFillStyleLst>
     </a:fmtScheme>
   </a:themeElements>
   <a:objectDefaults>
+    <a:spDef>
+      <a:spPr/>
+      <a:bodyPr/>
+      <a:lstStyle/>
+      <a:style>
+        <a:lnRef idx="1">
+          <a:schemeClr val="accent1"/>
+        </a:lnRef>
+        <a:fillRef idx="3">
+          <a:schemeClr val="accent1"/>
+        </a:fillRef>
+        <a:effectRef idx="2">
+          <a:schemeClr val="accent1"/>
+        </a:effectRef>
+        <a:fontRef idx="minor">
+          <a:schemeClr val="lt1"/>
+        </a:fontRef>
+      </a:style>
+    </a:spDef>
     <a:lnDef>
       <a:spPr/>
       <a:bodyPr/>
@@ -3964,16 +3585,5 @@
     </a:lnDef>
   </a:objectDefaults>
   <a:extraClrSchemeLst/>
-  <a:extLst>
-    <a:ext uri="{05A4C25C-085E-4340-85A3-A5531E510DB2}">
-      <thm15:themeFamily xmlns:thm15="http://schemas.microsoft.com/office/thememl/2012/main" name="Office Theme" id="{2E142A2C-CD16-42D6-873A-C26D2A0506FA}" vid="{1BDDFF52-6CD6-40A5-AB3C-68EB2F1E4D0A}"/>
-    </a:ext>
-  </a:extLst>
 </a:theme>
-</file>
-
-<file path=docMetadata/LabelInfo.xml><?xml version="1.0" encoding="utf-8"?>
-<clbl:labelList xmlns:clbl="http://schemas.microsoft.com/office/2020/mipLabelMetadata">
-  <clbl:label id="{f42aa342-8706-4288-bd11-ebb85995028c}" enabled="1" method="Standard" siteId="{72f988bf-86f1-41af-91ab-2d7cd011db47}" contentBits="0" removed="0"/>
-</clbl:labelList>
 </file>